--- a/public/fun/pack/pptx/review/보장점검양식_20_사업장점검_소나기지난뒤.pptx
+++ b/public/fun/pack/pptx/review/보장점검양식_20_사업장점검_소나기지난뒤.pptx
@@ -3347,7 +3347,7 @@
             <a:r>
               <a:rPr sz="3600" b="1" i="0">
                 <a:solidFill>
-                  <a:srgbClr val="23535C"/>
+                  <a:srgbClr val="11525F"/>
                 </a:solidFill>
               </a:rPr>
               <a:t>우리 보험 점검 시간</a:t>
@@ -3385,7 +3385,7 @@
             <a:r>
               <a:rPr sz="1700" b="0" i="1">
                 <a:solidFill>
-                  <a:srgbClr val="23535C"/>
+                  <a:srgbClr val="11525F"/>
                 </a:solidFill>
               </a:rPr>
               <a:t>갱신 시기를 달력에 표시합니다</a:t>
@@ -3460,7 +3460,7 @@
     <p:bg>
       <p:bgPr>
         <a:solidFill>
-          <a:srgbClr val="F0F8F9"/>
+          <a:srgbClr val="EEFAFC"/>
         </a:solidFill>
         <a:effectLst/>
       </p:bgPr>
@@ -3487,7 +3487,7 @@
             <a:avLst/>
           </a:prstGeom>
           <a:solidFill>
-            <a:srgbClr val="D1EBF0"/>
+            <a:srgbClr val="D1F3FA"/>
           </a:solidFill>
           <a:ln>
             <a:noFill/>
@@ -3516,7 +3516,7 @@
             <a:avLst/>
           </a:prstGeom>
           <a:solidFill>
-            <a:srgbClr val="3F95A6"/>
+            <a:srgbClr val="26AAC5"/>
           </a:solidFill>
           <a:ln>
             <a:noFill/>
@@ -3560,7 +3560,7 @@
             <a:r>
               <a:rPr sz="3000" b="1" i="0">
                 <a:solidFill>
-                  <a:srgbClr val="23535C"/>
+                  <a:srgbClr val="11525F"/>
                 </a:solidFill>
               </a:rPr>
               <a:t>점검 대상 현황</a:t>
@@ -3610,30 +3610,30 @@
                   <a:tcPr anchor="ctr" marL="73152" marR="73152">
                     <a:lnL w="9525" cap="flat" cmpd="sng" algn="ctr">
                       <a:solidFill>
-                        <a:srgbClr val="3F95A6"/>
+                        <a:srgbClr val="26AAC5"/>
                       </a:solidFill>
                       <a:prstDash val="solid"/>
                     </a:lnL>
                     <a:lnR w="9525" cap="flat" cmpd="sng" algn="ctr">
                       <a:solidFill>
-                        <a:srgbClr val="3F95A6"/>
+                        <a:srgbClr val="26AAC5"/>
                       </a:solidFill>
                       <a:prstDash val="solid"/>
                     </a:lnR>
                     <a:lnT w="9525" cap="flat" cmpd="sng" algn="ctr">
                       <a:solidFill>
-                        <a:srgbClr val="3F95A6"/>
+                        <a:srgbClr val="26AAC5"/>
                       </a:solidFill>
                       <a:prstDash val="solid"/>
                     </a:lnT>
                     <a:lnB w="9525" cap="flat" cmpd="sng" algn="ctr">
                       <a:solidFill>
-                        <a:srgbClr val="3F95A6"/>
+                        <a:srgbClr val="26AAC5"/>
                       </a:solidFill>
                       <a:prstDash val="solid"/>
                     </a:lnB>
                     <a:solidFill>
-                      <a:srgbClr val="3F95A6"/>
+                      <a:srgbClr val="26AAC5"/>
                     </a:solidFill>
                   </a:tcPr>
                 </a:tc>
@@ -3656,30 +3656,30 @@
                   <a:tcPr anchor="ctr" marL="73152" marR="73152">
                     <a:lnL w="9525" cap="flat" cmpd="sng" algn="ctr">
                       <a:solidFill>
-                        <a:srgbClr val="3F95A6"/>
+                        <a:srgbClr val="26AAC5"/>
                       </a:solidFill>
                       <a:prstDash val="solid"/>
                     </a:lnL>
                     <a:lnR w="9525" cap="flat" cmpd="sng" algn="ctr">
                       <a:solidFill>
-                        <a:srgbClr val="3F95A6"/>
+                        <a:srgbClr val="26AAC5"/>
                       </a:solidFill>
                       <a:prstDash val="solid"/>
                     </a:lnR>
                     <a:lnT w="9525" cap="flat" cmpd="sng" algn="ctr">
                       <a:solidFill>
-                        <a:srgbClr val="3F95A6"/>
+                        <a:srgbClr val="26AAC5"/>
                       </a:solidFill>
                       <a:prstDash val="solid"/>
                     </a:lnT>
                     <a:lnB w="9525" cap="flat" cmpd="sng" algn="ctr">
                       <a:solidFill>
-                        <a:srgbClr val="3F95A6"/>
+                        <a:srgbClr val="26AAC5"/>
                       </a:solidFill>
                       <a:prstDash val="solid"/>
                     </a:lnB>
                     <a:solidFill>
-                      <a:srgbClr val="3F95A6"/>
+                      <a:srgbClr val="26AAC5"/>
                     </a:solidFill>
                   </a:tcPr>
                 </a:tc>
@@ -3694,7 +3694,7 @@
                       <a:r>
                         <a:rPr sz="1600" b="1">
                           <a:solidFill>
-                            <a:srgbClr val="23535C"/>
+                            <a:srgbClr val="11525F"/>
                           </a:solidFill>
                         </a:rPr>
                         <a:t>상호</a:t>
@@ -3704,30 +3704,30 @@
                   <a:tcPr anchor="ctr" marL="73152" marR="73152">
                     <a:lnL w="9525" cap="flat" cmpd="sng" algn="ctr">
                       <a:solidFill>
-                        <a:srgbClr val="D1EBF0"/>
+                        <a:srgbClr val="D1F3FA"/>
                       </a:solidFill>
                       <a:prstDash val="solid"/>
                     </a:lnL>
                     <a:lnR w="9525" cap="flat" cmpd="sng" algn="ctr">
                       <a:solidFill>
-                        <a:srgbClr val="D1EBF0"/>
+                        <a:srgbClr val="D1F3FA"/>
                       </a:solidFill>
                       <a:prstDash val="solid"/>
                     </a:lnR>
                     <a:lnT w="9525" cap="flat" cmpd="sng" algn="ctr">
                       <a:solidFill>
-                        <a:srgbClr val="D1EBF0"/>
+                        <a:srgbClr val="D1F3FA"/>
                       </a:solidFill>
                       <a:prstDash val="solid"/>
                     </a:lnT>
                     <a:lnB w="9525" cap="flat" cmpd="sng" algn="ctr">
                       <a:solidFill>
-                        <a:srgbClr val="D1EBF0"/>
+                        <a:srgbClr val="D1F3FA"/>
                       </a:solidFill>
                       <a:prstDash val="solid"/>
                     </a:lnB>
                     <a:solidFill>
-                      <a:srgbClr val="D1EBF0"/>
+                      <a:srgbClr val="D1F3FA"/>
                     </a:solidFill>
                   </a:tcPr>
                 </a:tc>
@@ -3750,25 +3750,25 @@
                   <a:tcPr anchor="ctr" marL="73152" marR="73152">
                     <a:lnL w="9525" cap="flat" cmpd="sng" algn="ctr">
                       <a:solidFill>
-                        <a:srgbClr val="D1EBF0"/>
+                        <a:srgbClr val="D1F3FA"/>
                       </a:solidFill>
                       <a:prstDash val="solid"/>
                     </a:lnL>
                     <a:lnR w="9525" cap="flat" cmpd="sng" algn="ctr">
                       <a:solidFill>
-                        <a:srgbClr val="D1EBF0"/>
+                        <a:srgbClr val="D1F3FA"/>
                       </a:solidFill>
                       <a:prstDash val="solid"/>
                     </a:lnR>
                     <a:lnT w="9525" cap="flat" cmpd="sng" algn="ctr">
                       <a:solidFill>
-                        <a:srgbClr val="D1EBF0"/>
+                        <a:srgbClr val="D1F3FA"/>
                       </a:solidFill>
                       <a:prstDash val="solid"/>
                     </a:lnT>
                     <a:lnB w="9525" cap="flat" cmpd="sng" algn="ctr">
                       <a:solidFill>
-                        <a:srgbClr val="D1EBF0"/>
+                        <a:srgbClr val="D1F3FA"/>
                       </a:solidFill>
                       <a:prstDash val="solid"/>
                     </a:lnB>
@@ -3788,7 +3788,7 @@
                       <a:r>
                         <a:rPr sz="1600" b="1">
                           <a:solidFill>
-                            <a:srgbClr val="23535C"/>
+                            <a:srgbClr val="11525F"/>
                           </a:solidFill>
                         </a:rPr>
                         <a:t>업종</a:t>
@@ -3798,30 +3798,30 @@
                   <a:tcPr anchor="ctr" marL="73152" marR="73152">
                     <a:lnL w="9525" cap="flat" cmpd="sng" algn="ctr">
                       <a:solidFill>
-                        <a:srgbClr val="D1EBF0"/>
+                        <a:srgbClr val="D1F3FA"/>
                       </a:solidFill>
                       <a:prstDash val="solid"/>
                     </a:lnL>
                     <a:lnR w="9525" cap="flat" cmpd="sng" algn="ctr">
                       <a:solidFill>
-                        <a:srgbClr val="D1EBF0"/>
+                        <a:srgbClr val="D1F3FA"/>
                       </a:solidFill>
                       <a:prstDash val="solid"/>
                     </a:lnR>
                     <a:lnT w="9525" cap="flat" cmpd="sng" algn="ctr">
                       <a:solidFill>
-                        <a:srgbClr val="D1EBF0"/>
+                        <a:srgbClr val="D1F3FA"/>
                       </a:solidFill>
                       <a:prstDash val="solid"/>
                     </a:lnT>
                     <a:lnB w="9525" cap="flat" cmpd="sng" algn="ctr">
                       <a:solidFill>
-                        <a:srgbClr val="D1EBF0"/>
+                        <a:srgbClr val="D1F3FA"/>
                       </a:solidFill>
                       <a:prstDash val="solid"/>
                     </a:lnB>
                     <a:solidFill>
-                      <a:srgbClr val="D1EBF0"/>
+                      <a:srgbClr val="D1F3FA"/>
                     </a:solidFill>
                   </a:tcPr>
                 </a:tc>
@@ -3844,30 +3844,30 @@
                   <a:tcPr anchor="ctr" marL="73152" marR="73152">
                     <a:lnL w="9525" cap="flat" cmpd="sng" algn="ctr">
                       <a:solidFill>
-                        <a:srgbClr val="D1EBF0"/>
+                        <a:srgbClr val="D1F3FA"/>
                       </a:solidFill>
                       <a:prstDash val="solid"/>
                     </a:lnL>
                     <a:lnR w="9525" cap="flat" cmpd="sng" algn="ctr">
                       <a:solidFill>
-                        <a:srgbClr val="D1EBF0"/>
+                        <a:srgbClr val="D1F3FA"/>
                       </a:solidFill>
                       <a:prstDash val="solid"/>
                     </a:lnR>
                     <a:lnT w="9525" cap="flat" cmpd="sng" algn="ctr">
                       <a:solidFill>
-                        <a:srgbClr val="D1EBF0"/>
+                        <a:srgbClr val="D1F3FA"/>
                       </a:solidFill>
                       <a:prstDash val="solid"/>
                     </a:lnT>
                     <a:lnB w="9525" cap="flat" cmpd="sng" algn="ctr">
                       <a:solidFill>
-                        <a:srgbClr val="D1EBF0"/>
+                        <a:srgbClr val="D1F3FA"/>
                       </a:solidFill>
                       <a:prstDash val="solid"/>
                     </a:lnB>
                     <a:solidFill>
-                      <a:srgbClr val="F0F8F9"/>
+                      <a:srgbClr val="EEFAFC"/>
                     </a:solidFill>
                   </a:tcPr>
                 </a:tc>
@@ -3882,7 +3882,7 @@
                       <a:r>
                         <a:rPr sz="1600" b="1">
                           <a:solidFill>
-                            <a:srgbClr val="23535C"/>
+                            <a:srgbClr val="11525F"/>
                           </a:solidFill>
                         </a:rPr>
                         <a:t>직원 수</a:t>
@@ -3892,30 +3892,30 @@
                   <a:tcPr anchor="ctr" marL="73152" marR="73152">
                     <a:lnL w="9525" cap="flat" cmpd="sng" algn="ctr">
                       <a:solidFill>
-                        <a:srgbClr val="D1EBF0"/>
+                        <a:srgbClr val="D1F3FA"/>
                       </a:solidFill>
                       <a:prstDash val="solid"/>
                     </a:lnL>
                     <a:lnR w="9525" cap="flat" cmpd="sng" algn="ctr">
                       <a:solidFill>
-                        <a:srgbClr val="D1EBF0"/>
+                        <a:srgbClr val="D1F3FA"/>
                       </a:solidFill>
                       <a:prstDash val="solid"/>
                     </a:lnR>
                     <a:lnT w="9525" cap="flat" cmpd="sng" algn="ctr">
                       <a:solidFill>
-                        <a:srgbClr val="D1EBF0"/>
+                        <a:srgbClr val="D1F3FA"/>
                       </a:solidFill>
                       <a:prstDash val="solid"/>
                     </a:lnT>
                     <a:lnB w="9525" cap="flat" cmpd="sng" algn="ctr">
                       <a:solidFill>
-                        <a:srgbClr val="D1EBF0"/>
+                        <a:srgbClr val="D1F3FA"/>
                       </a:solidFill>
                       <a:prstDash val="solid"/>
                     </a:lnB>
                     <a:solidFill>
-                      <a:srgbClr val="D1EBF0"/>
+                      <a:srgbClr val="D1F3FA"/>
                     </a:solidFill>
                   </a:tcPr>
                 </a:tc>
@@ -3938,25 +3938,25 @@
                   <a:tcPr anchor="ctr" marL="73152" marR="73152">
                     <a:lnL w="9525" cap="flat" cmpd="sng" algn="ctr">
                       <a:solidFill>
-                        <a:srgbClr val="D1EBF0"/>
+                        <a:srgbClr val="D1F3FA"/>
                       </a:solidFill>
                       <a:prstDash val="solid"/>
                     </a:lnL>
                     <a:lnR w="9525" cap="flat" cmpd="sng" algn="ctr">
                       <a:solidFill>
-                        <a:srgbClr val="D1EBF0"/>
+                        <a:srgbClr val="D1F3FA"/>
                       </a:solidFill>
                       <a:prstDash val="solid"/>
                     </a:lnR>
                     <a:lnT w="9525" cap="flat" cmpd="sng" algn="ctr">
                       <a:solidFill>
-                        <a:srgbClr val="D1EBF0"/>
+                        <a:srgbClr val="D1F3FA"/>
                       </a:solidFill>
                       <a:prstDash val="solid"/>
                     </a:lnT>
                     <a:lnB w="9525" cap="flat" cmpd="sng" algn="ctr">
                       <a:solidFill>
-                        <a:srgbClr val="D1EBF0"/>
+                        <a:srgbClr val="D1F3FA"/>
                       </a:solidFill>
                       <a:prstDash val="solid"/>
                     </a:lnB>
@@ -3976,7 +3976,7 @@
                       <a:r>
                         <a:rPr sz="1600" b="1">
                           <a:solidFill>
-                            <a:srgbClr val="23535C"/>
+                            <a:srgbClr val="11525F"/>
                           </a:solidFill>
                         </a:rPr>
                         <a:t>확인할 것</a:t>
@@ -3986,30 +3986,30 @@
                   <a:tcPr anchor="ctr" marL="73152" marR="73152">
                     <a:lnL w="9525" cap="flat" cmpd="sng" algn="ctr">
                       <a:solidFill>
-                        <a:srgbClr val="D1EBF0"/>
+                        <a:srgbClr val="D1F3FA"/>
                       </a:solidFill>
                       <a:prstDash val="solid"/>
                     </a:lnL>
                     <a:lnR w="9525" cap="flat" cmpd="sng" algn="ctr">
                       <a:solidFill>
-                        <a:srgbClr val="D1EBF0"/>
+                        <a:srgbClr val="D1F3FA"/>
                       </a:solidFill>
                       <a:prstDash val="solid"/>
                     </a:lnR>
                     <a:lnT w="9525" cap="flat" cmpd="sng" algn="ctr">
                       <a:solidFill>
-                        <a:srgbClr val="D1EBF0"/>
+                        <a:srgbClr val="D1F3FA"/>
                       </a:solidFill>
                       <a:prstDash val="solid"/>
                     </a:lnT>
                     <a:lnB w="9525" cap="flat" cmpd="sng" algn="ctr">
                       <a:solidFill>
-                        <a:srgbClr val="D1EBF0"/>
+                        <a:srgbClr val="D1F3FA"/>
                       </a:solidFill>
                       <a:prstDash val="solid"/>
                     </a:lnB>
                     <a:solidFill>
-                      <a:srgbClr val="D1EBF0"/>
+                      <a:srgbClr val="D1F3FA"/>
                     </a:solidFill>
                   </a:tcPr>
                 </a:tc>
@@ -4032,30 +4032,30 @@
                   <a:tcPr anchor="ctr" marL="73152" marR="73152">
                     <a:lnL w="9525" cap="flat" cmpd="sng" algn="ctr">
                       <a:solidFill>
-                        <a:srgbClr val="D1EBF0"/>
+                        <a:srgbClr val="D1F3FA"/>
                       </a:solidFill>
                       <a:prstDash val="solid"/>
                     </a:lnL>
                     <a:lnR w="9525" cap="flat" cmpd="sng" algn="ctr">
                       <a:solidFill>
-                        <a:srgbClr val="D1EBF0"/>
+                        <a:srgbClr val="D1F3FA"/>
                       </a:solidFill>
                       <a:prstDash val="solid"/>
                     </a:lnR>
                     <a:lnT w="9525" cap="flat" cmpd="sng" algn="ctr">
                       <a:solidFill>
-                        <a:srgbClr val="D1EBF0"/>
+                        <a:srgbClr val="D1F3FA"/>
                       </a:solidFill>
                       <a:prstDash val="solid"/>
                     </a:lnT>
                     <a:lnB w="9525" cap="flat" cmpd="sng" algn="ctr">
                       <a:solidFill>
-                        <a:srgbClr val="D1EBF0"/>
+                        <a:srgbClr val="D1F3FA"/>
                       </a:solidFill>
                       <a:prstDash val="solid"/>
                     </a:lnB>
                     <a:solidFill>
-                      <a:srgbClr val="F0F8F9"/>
+                      <a:srgbClr val="EEFAFC"/>
                     </a:solidFill>
                   </a:tcPr>
                 </a:tc>
@@ -4078,7 +4078,7 @@
     <p:bg>
       <p:bgPr>
         <a:solidFill>
-          <a:srgbClr val="F0F8F9"/>
+          <a:srgbClr val="EEFAFC"/>
         </a:solidFill>
         <a:effectLst/>
       </p:bgPr>
@@ -4105,7 +4105,7 @@
             <a:avLst/>
           </a:prstGeom>
           <a:solidFill>
-            <a:srgbClr val="D1EBF0"/>
+            <a:srgbClr val="D1F3FA"/>
           </a:solidFill>
           <a:ln>
             <a:noFill/>
@@ -4134,7 +4134,7 @@
             <a:avLst/>
           </a:prstGeom>
           <a:solidFill>
-            <a:srgbClr val="3F95A6"/>
+            <a:srgbClr val="26AAC5"/>
           </a:solidFill>
           <a:ln>
             <a:noFill/>
@@ -4178,7 +4178,7 @@
             <a:r>
               <a:rPr sz="3000" b="1" i="0">
                 <a:solidFill>
-                  <a:srgbClr val="23535C"/>
+                  <a:srgbClr val="11525F"/>
                 </a:solidFill>
               </a:rPr>
               <a:t>가입한 보험 목록</a:t>
@@ -4231,30 +4231,30 @@
                   <a:tcPr anchor="ctr" marL="73152" marR="73152">
                     <a:lnL w="9525" cap="flat" cmpd="sng" algn="ctr">
                       <a:solidFill>
-                        <a:srgbClr val="3F95A6"/>
+                        <a:srgbClr val="26AAC5"/>
                       </a:solidFill>
                       <a:prstDash val="solid"/>
                     </a:lnL>
                     <a:lnR w="9525" cap="flat" cmpd="sng" algn="ctr">
                       <a:solidFill>
-                        <a:srgbClr val="3F95A6"/>
+                        <a:srgbClr val="26AAC5"/>
                       </a:solidFill>
                       <a:prstDash val="solid"/>
                     </a:lnR>
                     <a:lnT w="9525" cap="flat" cmpd="sng" algn="ctr">
                       <a:solidFill>
-                        <a:srgbClr val="3F95A6"/>
+                        <a:srgbClr val="26AAC5"/>
                       </a:solidFill>
                       <a:prstDash val="solid"/>
                     </a:lnT>
                     <a:lnB w="9525" cap="flat" cmpd="sng" algn="ctr">
                       <a:solidFill>
-                        <a:srgbClr val="3F95A6"/>
+                        <a:srgbClr val="26AAC5"/>
                       </a:solidFill>
                       <a:prstDash val="solid"/>
                     </a:lnB>
                     <a:solidFill>
-                      <a:srgbClr val="3F95A6"/>
+                      <a:srgbClr val="26AAC5"/>
                     </a:solidFill>
                   </a:tcPr>
                 </a:tc>
@@ -4277,30 +4277,30 @@
                   <a:tcPr anchor="ctr" marL="73152" marR="73152">
                     <a:lnL w="9525" cap="flat" cmpd="sng" algn="ctr">
                       <a:solidFill>
-                        <a:srgbClr val="3F95A6"/>
+                        <a:srgbClr val="26AAC5"/>
                       </a:solidFill>
                       <a:prstDash val="solid"/>
                     </a:lnL>
                     <a:lnR w="9525" cap="flat" cmpd="sng" algn="ctr">
                       <a:solidFill>
-                        <a:srgbClr val="3F95A6"/>
+                        <a:srgbClr val="26AAC5"/>
                       </a:solidFill>
                       <a:prstDash val="solid"/>
                     </a:lnR>
                     <a:lnT w="9525" cap="flat" cmpd="sng" algn="ctr">
                       <a:solidFill>
-                        <a:srgbClr val="3F95A6"/>
+                        <a:srgbClr val="26AAC5"/>
                       </a:solidFill>
                       <a:prstDash val="solid"/>
                     </a:lnT>
                     <a:lnB w="9525" cap="flat" cmpd="sng" algn="ctr">
                       <a:solidFill>
-                        <a:srgbClr val="3F95A6"/>
+                        <a:srgbClr val="26AAC5"/>
                       </a:solidFill>
                       <a:prstDash val="solid"/>
                     </a:lnB>
                     <a:solidFill>
-                      <a:srgbClr val="3F95A6"/>
+                      <a:srgbClr val="26AAC5"/>
                     </a:solidFill>
                   </a:tcPr>
                 </a:tc>
@@ -4323,30 +4323,30 @@
                   <a:tcPr anchor="ctr" marL="73152" marR="73152">
                     <a:lnL w="9525" cap="flat" cmpd="sng" algn="ctr">
                       <a:solidFill>
-                        <a:srgbClr val="3F95A6"/>
+                        <a:srgbClr val="26AAC5"/>
                       </a:solidFill>
                       <a:prstDash val="solid"/>
                     </a:lnL>
                     <a:lnR w="9525" cap="flat" cmpd="sng" algn="ctr">
                       <a:solidFill>
-                        <a:srgbClr val="3F95A6"/>
+                        <a:srgbClr val="26AAC5"/>
                       </a:solidFill>
                       <a:prstDash val="solid"/>
                     </a:lnR>
                     <a:lnT w="9525" cap="flat" cmpd="sng" algn="ctr">
                       <a:solidFill>
-                        <a:srgbClr val="3F95A6"/>
+                        <a:srgbClr val="26AAC5"/>
                       </a:solidFill>
                       <a:prstDash val="solid"/>
                     </a:lnT>
                     <a:lnB w="9525" cap="flat" cmpd="sng" algn="ctr">
                       <a:solidFill>
-                        <a:srgbClr val="3F95A6"/>
+                        <a:srgbClr val="26AAC5"/>
                       </a:solidFill>
                       <a:prstDash val="solid"/>
                     </a:lnB>
                     <a:solidFill>
-                      <a:srgbClr val="3F95A6"/>
+                      <a:srgbClr val="26AAC5"/>
                     </a:solidFill>
                   </a:tcPr>
                 </a:tc>
@@ -4369,30 +4369,30 @@
                   <a:tcPr anchor="ctr" marL="73152" marR="73152">
                     <a:lnL w="9525" cap="flat" cmpd="sng" algn="ctr">
                       <a:solidFill>
-                        <a:srgbClr val="3F95A6"/>
+                        <a:srgbClr val="26AAC5"/>
                       </a:solidFill>
                       <a:prstDash val="solid"/>
                     </a:lnL>
                     <a:lnR w="9525" cap="flat" cmpd="sng" algn="ctr">
                       <a:solidFill>
-                        <a:srgbClr val="3F95A6"/>
+                        <a:srgbClr val="26AAC5"/>
                       </a:solidFill>
                       <a:prstDash val="solid"/>
                     </a:lnR>
                     <a:lnT w="9525" cap="flat" cmpd="sng" algn="ctr">
                       <a:solidFill>
-                        <a:srgbClr val="3F95A6"/>
+                        <a:srgbClr val="26AAC5"/>
                       </a:solidFill>
                       <a:prstDash val="solid"/>
                     </a:lnT>
                     <a:lnB w="9525" cap="flat" cmpd="sng" algn="ctr">
                       <a:solidFill>
-                        <a:srgbClr val="3F95A6"/>
+                        <a:srgbClr val="26AAC5"/>
                       </a:solidFill>
                       <a:prstDash val="solid"/>
                     </a:lnB>
                     <a:solidFill>
-                      <a:srgbClr val="3F95A6"/>
+                      <a:srgbClr val="26AAC5"/>
                     </a:solidFill>
                   </a:tcPr>
                 </a:tc>
@@ -4415,30 +4415,30 @@
                   <a:tcPr anchor="ctr" marL="73152" marR="73152">
                     <a:lnL w="9525" cap="flat" cmpd="sng" algn="ctr">
                       <a:solidFill>
-                        <a:srgbClr val="3F95A6"/>
+                        <a:srgbClr val="26AAC5"/>
                       </a:solidFill>
                       <a:prstDash val="solid"/>
                     </a:lnL>
                     <a:lnR w="9525" cap="flat" cmpd="sng" algn="ctr">
                       <a:solidFill>
-                        <a:srgbClr val="3F95A6"/>
+                        <a:srgbClr val="26AAC5"/>
                       </a:solidFill>
                       <a:prstDash val="solid"/>
                     </a:lnR>
                     <a:lnT w="9525" cap="flat" cmpd="sng" algn="ctr">
                       <a:solidFill>
-                        <a:srgbClr val="3F95A6"/>
+                        <a:srgbClr val="26AAC5"/>
                       </a:solidFill>
                       <a:prstDash val="solid"/>
                     </a:lnT>
                     <a:lnB w="9525" cap="flat" cmpd="sng" algn="ctr">
                       <a:solidFill>
-                        <a:srgbClr val="3F95A6"/>
+                        <a:srgbClr val="26AAC5"/>
                       </a:solidFill>
                       <a:prstDash val="solid"/>
                     </a:lnB>
                     <a:solidFill>
-                      <a:srgbClr val="3F95A6"/>
+                      <a:srgbClr val="26AAC5"/>
                     </a:solidFill>
                   </a:tcPr>
                 </a:tc>
@@ -4463,25 +4463,25 @@
                   <a:tcPr anchor="ctr" marL="73152" marR="73152">
                     <a:lnL w="9525" cap="flat" cmpd="sng" algn="ctr">
                       <a:solidFill>
-                        <a:srgbClr val="D1EBF0"/>
+                        <a:srgbClr val="D1F3FA"/>
                       </a:solidFill>
                       <a:prstDash val="solid"/>
                     </a:lnL>
                     <a:lnR w="9525" cap="flat" cmpd="sng" algn="ctr">
                       <a:solidFill>
-                        <a:srgbClr val="D1EBF0"/>
+                        <a:srgbClr val="D1F3FA"/>
                       </a:solidFill>
                       <a:prstDash val="solid"/>
                     </a:lnR>
                     <a:lnT w="9525" cap="flat" cmpd="sng" algn="ctr">
                       <a:solidFill>
-                        <a:srgbClr val="D1EBF0"/>
+                        <a:srgbClr val="D1F3FA"/>
                       </a:solidFill>
                       <a:prstDash val="solid"/>
                     </a:lnT>
                     <a:lnB w="9525" cap="flat" cmpd="sng" algn="ctr">
                       <a:solidFill>
-                        <a:srgbClr val="D1EBF0"/>
+                        <a:srgbClr val="D1F3FA"/>
                       </a:solidFill>
                       <a:prstDash val="solid"/>
                     </a:lnB>
@@ -4509,25 +4509,25 @@
                   <a:tcPr anchor="ctr" marL="73152" marR="73152">
                     <a:lnL w="9525" cap="flat" cmpd="sng" algn="ctr">
                       <a:solidFill>
-                        <a:srgbClr val="D1EBF0"/>
+                        <a:srgbClr val="D1F3FA"/>
                       </a:solidFill>
                       <a:prstDash val="solid"/>
                     </a:lnL>
                     <a:lnR w="9525" cap="flat" cmpd="sng" algn="ctr">
                       <a:solidFill>
-                        <a:srgbClr val="D1EBF0"/>
+                        <a:srgbClr val="D1F3FA"/>
                       </a:solidFill>
                       <a:prstDash val="solid"/>
                     </a:lnR>
                     <a:lnT w="9525" cap="flat" cmpd="sng" algn="ctr">
                       <a:solidFill>
-                        <a:srgbClr val="D1EBF0"/>
+                        <a:srgbClr val="D1F3FA"/>
                       </a:solidFill>
                       <a:prstDash val="solid"/>
                     </a:lnT>
                     <a:lnB w="9525" cap="flat" cmpd="sng" algn="ctr">
                       <a:solidFill>
-                        <a:srgbClr val="D1EBF0"/>
+                        <a:srgbClr val="D1F3FA"/>
                       </a:solidFill>
                       <a:prstDash val="solid"/>
                     </a:lnB>
@@ -4555,25 +4555,25 @@
                   <a:tcPr anchor="ctr" marL="73152" marR="73152">
                     <a:lnL w="9525" cap="flat" cmpd="sng" algn="ctr">
                       <a:solidFill>
-                        <a:srgbClr val="D1EBF0"/>
+                        <a:srgbClr val="D1F3FA"/>
                       </a:solidFill>
                       <a:prstDash val="solid"/>
                     </a:lnL>
                     <a:lnR w="9525" cap="flat" cmpd="sng" algn="ctr">
                       <a:solidFill>
-                        <a:srgbClr val="D1EBF0"/>
+                        <a:srgbClr val="D1F3FA"/>
                       </a:solidFill>
                       <a:prstDash val="solid"/>
                     </a:lnR>
                     <a:lnT w="9525" cap="flat" cmpd="sng" algn="ctr">
                       <a:solidFill>
-                        <a:srgbClr val="D1EBF0"/>
+                        <a:srgbClr val="D1F3FA"/>
                       </a:solidFill>
                       <a:prstDash val="solid"/>
                     </a:lnT>
                     <a:lnB w="9525" cap="flat" cmpd="sng" algn="ctr">
                       <a:solidFill>
-                        <a:srgbClr val="D1EBF0"/>
+                        <a:srgbClr val="D1F3FA"/>
                       </a:solidFill>
                       <a:prstDash val="solid"/>
                     </a:lnB>
@@ -4601,25 +4601,25 @@
                   <a:tcPr anchor="ctr" marL="73152" marR="73152">
                     <a:lnL w="9525" cap="flat" cmpd="sng" algn="ctr">
                       <a:solidFill>
-                        <a:srgbClr val="D1EBF0"/>
+                        <a:srgbClr val="D1F3FA"/>
                       </a:solidFill>
                       <a:prstDash val="solid"/>
                     </a:lnL>
                     <a:lnR w="9525" cap="flat" cmpd="sng" algn="ctr">
                       <a:solidFill>
-                        <a:srgbClr val="D1EBF0"/>
+                        <a:srgbClr val="D1F3FA"/>
                       </a:solidFill>
                       <a:prstDash val="solid"/>
                     </a:lnR>
                     <a:lnT w="9525" cap="flat" cmpd="sng" algn="ctr">
                       <a:solidFill>
-                        <a:srgbClr val="D1EBF0"/>
+                        <a:srgbClr val="D1F3FA"/>
                       </a:solidFill>
                       <a:prstDash val="solid"/>
                     </a:lnT>
                     <a:lnB w="9525" cap="flat" cmpd="sng" algn="ctr">
                       <a:solidFill>
-                        <a:srgbClr val="D1EBF0"/>
+                        <a:srgbClr val="D1F3FA"/>
                       </a:solidFill>
                       <a:prstDash val="solid"/>
                     </a:lnB>
@@ -4647,25 +4647,25 @@
                   <a:tcPr anchor="ctr" marL="73152" marR="73152">
                     <a:lnL w="9525" cap="flat" cmpd="sng" algn="ctr">
                       <a:solidFill>
-                        <a:srgbClr val="D1EBF0"/>
+                        <a:srgbClr val="D1F3FA"/>
                       </a:solidFill>
                       <a:prstDash val="solid"/>
                     </a:lnL>
                     <a:lnR w="9525" cap="flat" cmpd="sng" algn="ctr">
                       <a:solidFill>
-                        <a:srgbClr val="D1EBF0"/>
+                        <a:srgbClr val="D1F3FA"/>
                       </a:solidFill>
                       <a:prstDash val="solid"/>
                     </a:lnR>
                     <a:lnT w="9525" cap="flat" cmpd="sng" algn="ctr">
                       <a:solidFill>
-                        <a:srgbClr val="D1EBF0"/>
+                        <a:srgbClr val="D1F3FA"/>
                       </a:solidFill>
                       <a:prstDash val="solid"/>
                     </a:lnT>
                     <a:lnB w="9525" cap="flat" cmpd="sng" algn="ctr">
                       <a:solidFill>
-                        <a:srgbClr val="D1EBF0"/>
+                        <a:srgbClr val="D1F3FA"/>
                       </a:solidFill>
                       <a:prstDash val="solid"/>
                     </a:lnB>
@@ -4695,30 +4695,30 @@
                   <a:tcPr anchor="ctr" marL="73152" marR="73152">
                     <a:lnL w="9525" cap="flat" cmpd="sng" algn="ctr">
                       <a:solidFill>
-                        <a:srgbClr val="D1EBF0"/>
+                        <a:srgbClr val="D1F3FA"/>
                       </a:solidFill>
                       <a:prstDash val="solid"/>
                     </a:lnL>
                     <a:lnR w="9525" cap="flat" cmpd="sng" algn="ctr">
                       <a:solidFill>
-                        <a:srgbClr val="D1EBF0"/>
+                        <a:srgbClr val="D1F3FA"/>
                       </a:solidFill>
                       <a:prstDash val="solid"/>
                     </a:lnR>
                     <a:lnT w="9525" cap="flat" cmpd="sng" algn="ctr">
                       <a:solidFill>
-                        <a:srgbClr val="D1EBF0"/>
+                        <a:srgbClr val="D1F3FA"/>
                       </a:solidFill>
                       <a:prstDash val="solid"/>
                     </a:lnT>
                     <a:lnB w="9525" cap="flat" cmpd="sng" algn="ctr">
                       <a:solidFill>
-                        <a:srgbClr val="D1EBF0"/>
+                        <a:srgbClr val="D1F3FA"/>
                       </a:solidFill>
                       <a:prstDash val="solid"/>
                     </a:lnB>
                     <a:solidFill>
-                      <a:srgbClr val="F0F8F9"/>
+                      <a:srgbClr val="EEFAFC"/>
                     </a:solidFill>
                   </a:tcPr>
                 </a:tc>
@@ -4741,30 +4741,30 @@
                   <a:tcPr anchor="ctr" marL="73152" marR="73152">
                     <a:lnL w="9525" cap="flat" cmpd="sng" algn="ctr">
                       <a:solidFill>
-                        <a:srgbClr val="D1EBF0"/>
+                        <a:srgbClr val="D1F3FA"/>
                       </a:solidFill>
                       <a:prstDash val="solid"/>
                     </a:lnL>
                     <a:lnR w="9525" cap="flat" cmpd="sng" algn="ctr">
                       <a:solidFill>
-                        <a:srgbClr val="D1EBF0"/>
+                        <a:srgbClr val="D1F3FA"/>
                       </a:solidFill>
                       <a:prstDash val="solid"/>
                     </a:lnR>
                     <a:lnT w="9525" cap="flat" cmpd="sng" algn="ctr">
                       <a:solidFill>
-                        <a:srgbClr val="D1EBF0"/>
+                        <a:srgbClr val="D1F3FA"/>
                       </a:solidFill>
                       <a:prstDash val="solid"/>
                     </a:lnT>
                     <a:lnB w="9525" cap="flat" cmpd="sng" algn="ctr">
                       <a:solidFill>
-                        <a:srgbClr val="D1EBF0"/>
+                        <a:srgbClr val="D1F3FA"/>
                       </a:solidFill>
                       <a:prstDash val="solid"/>
                     </a:lnB>
                     <a:solidFill>
-                      <a:srgbClr val="F0F8F9"/>
+                      <a:srgbClr val="EEFAFC"/>
                     </a:solidFill>
                   </a:tcPr>
                 </a:tc>
@@ -4787,30 +4787,30 @@
                   <a:tcPr anchor="ctr" marL="73152" marR="73152">
                     <a:lnL w="9525" cap="flat" cmpd="sng" algn="ctr">
                       <a:solidFill>
-                        <a:srgbClr val="D1EBF0"/>
+                        <a:srgbClr val="D1F3FA"/>
                       </a:solidFill>
                       <a:prstDash val="solid"/>
                     </a:lnL>
                     <a:lnR w="9525" cap="flat" cmpd="sng" algn="ctr">
                       <a:solidFill>
-                        <a:srgbClr val="D1EBF0"/>
+                        <a:srgbClr val="D1F3FA"/>
                       </a:solidFill>
                       <a:prstDash val="solid"/>
                     </a:lnR>
                     <a:lnT w="9525" cap="flat" cmpd="sng" algn="ctr">
                       <a:solidFill>
-                        <a:srgbClr val="D1EBF0"/>
+                        <a:srgbClr val="D1F3FA"/>
                       </a:solidFill>
                       <a:prstDash val="solid"/>
                     </a:lnT>
                     <a:lnB w="9525" cap="flat" cmpd="sng" algn="ctr">
                       <a:solidFill>
-                        <a:srgbClr val="D1EBF0"/>
+                        <a:srgbClr val="D1F3FA"/>
                       </a:solidFill>
                       <a:prstDash val="solid"/>
                     </a:lnB>
                     <a:solidFill>
-                      <a:srgbClr val="F0F8F9"/>
+                      <a:srgbClr val="EEFAFC"/>
                     </a:solidFill>
                   </a:tcPr>
                 </a:tc>
@@ -4833,30 +4833,30 @@
                   <a:tcPr anchor="ctr" marL="73152" marR="73152">
                     <a:lnL w="9525" cap="flat" cmpd="sng" algn="ctr">
                       <a:solidFill>
-                        <a:srgbClr val="D1EBF0"/>
+                        <a:srgbClr val="D1F3FA"/>
                       </a:solidFill>
                       <a:prstDash val="solid"/>
                     </a:lnL>
                     <a:lnR w="9525" cap="flat" cmpd="sng" algn="ctr">
                       <a:solidFill>
-                        <a:srgbClr val="D1EBF0"/>
+                        <a:srgbClr val="D1F3FA"/>
                       </a:solidFill>
                       <a:prstDash val="solid"/>
                     </a:lnR>
                     <a:lnT w="9525" cap="flat" cmpd="sng" algn="ctr">
                       <a:solidFill>
-                        <a:srgbClr val="D1EBF0"/>
+                        <a:srgbClr val="D1F3FA"/>
                       </a:solidFill>
                       <a:prstDash val="solid"/>
                     </a:lnT>
                     <a:lnB w="9525" cap="flat" cmpd="sng" algn="ctr">
                       <a:solidFill>
-                        <a:srgbClr val="D1EBF0"/>
+                        <a:srgbClr val="D1F3FA"/>
                       </a:solidFill>
                       <a:prstDash val="solid"/>
                     </a:lnB>
                     <a:solidFill>
-                      <a:srgbClr val="F0F8F9"/>
+                      <a:srgbClr val="EEFAFC"/>
                     </a:solidFill>
                   </a:tcPr>
                 </a:tc>
@@ -4879,30 +4879,30 @@
                   <a:tcPr anchor="ctr" marL="73152" marR="73152">
                     <a:lnL w="9525" cap="flat" cmpd="sng" algn="ctr">
                       <a:solidFill>
-                        <a:srgbClr val="D1EBF0"/>
+                        <a:srgbClr val="D1F3FA"/>
                       </a:solidFill>
                       <a:prstDash val="solid"/>
                     </a:lnL>
                     <a:lnR w="9525" cap="flat" cmpd="sng" algn="ctr">
                       <a:solidFill>
-                        <a:srgbClr val="D1EBF0"/>
+                        <a:srgbClr val="D1F3FA"/>
                       </a:solidFill>
                       <a:prstDash val="solid"/>
                     </a:lnR>
                     <a:lnT w="9525" cap="flat" cmpd="sng" algn="ctr">
                       <a:solidFill>
-                        <a:srgbClr val="D1EBF0"/>
+                        <a:srgbClr val="D1F3FA"/>
                       </a:solidFill>
                       <a:prstDash val="solid"/>
                     </a:lnT>
                     <a:lnB w="9525" cap="flat" cmpd="sng" algn="ctr">
                       <a:solidFill>
-                        <a:srgbClr val="D1EBF0"/>
+                        <a:srgbClr val="D1F3FA"/>
                       </a:solidFill>
                       <a:prstDash val="solid"/>
                     </a:lnB>
                     <a:solidFill>
-                      <a:srgbClr val="F0F8F9"/>
+                      <a:srgbClr val="EEFAFC"/>
                     </a:solidFill>
                   </a:tcPr>
                 </a:tc>
@@ -4927,25 +4927,25 @@
                   <a:tcPr anchor="ctr" marL="73152" marR="73152">
                     <a:lnL w="9525" cap="flat" cmpd="sng" algn="ctr">
                       <a:solidFill>
-                        <a:srgbClr val="D1EBF0"/>
+                        <a:srgbClr val="D1F3FA"/>
                       </a:solidFill>
                       <a:prstDash val="solid"/>
                     </a:lnL>
                     <a:lnR w="9525" cap="flat" cmpd="sng" algn="ctr">
                       <a:solidFill>
-                        <a:srgbClr val="D1EBF0"/>
+                        <a:srgbClr val="D1F3FA"/>
                       </a:solidFill>
                       <a:prstDash val="solid"/>
                     </a:lnR>
                     <a:lnT w="9525" cap="flat" cmpd="sng" algn="ctr">
                       <a:solidFill>
-                        <a:srgbClr val="D1EBF0"/>
+                        <a:srgbClr val="D1F3FA"/>
                       </a:solidFill>
                       <a:prstDash val="solid"/>
                     </a:lnT>
                     <a:lnB w="9525" cap="flat" cmpd="sng" algn="ctr">
                       <a:solidFill>
-                        <a:srgbClr val="D1EBF0"/>
+                        <a:srgbClr val="D1F3FA"/>
                       </a:solidFill>
                       <a:prstDash val="solid"/>
                     </a:lnB>
@@ -4973,25 +4973,25 @@
                   <a:tcPr anchor="ctr" marL="73152" marR="73152">
                     <a:lnL w="9525" cap="flat" cmpd="sng" algn="ctr">
                       <a:solidFill>
-                        <a:srgbClr val="D1EBF0"/>
+                        <a:srgbClr val="D1F3FA"/>
                       </a:solidFill>
                       <a:prstDash val="solid"/>
                     </a:lnL>
                     <a:lnR w="9525" cap="flat" cmpd="sng" algn="ctr">
                       <a:solidFill>
-                        <a:srgbClr val="D1EBF0"/>
+                        <a:srgbClr val="D1F3FA"/>
                       </a:solidFill>
                       <a:prstDash val="solid"/>
                     </a:lnR>
                     <a:lnT w="9525" cap="flat" cmpd="sng" algn="ctr">
                       <a:solidFill>
-                        <a:srgbClr val="D1EBF0"/>
+                        <a:srgbClr val="D1F3FA"/>
                       </a:solidFill>
                       <a:prstDash val="solid"/>
                     </a:lnT>
                     <a:lnB w="9525" cap="flat" cmpd="sng" algn="ctr">
                       <a:solidFill>
-                        <a:srgbClr val="D1EBF0"/>
+                        <a:srgbClr val="D1F3FA"/>
                       </a:solidFill>
                       <a:prstDash val="solid"/>
                     </a:lnB>
@@ -5019,25 +5019,25 @@
                   <a:tcPr anchor="ctr" marL="73152" marR="73152">
                     <a:lnL w="9525" cap="flat" cmpd="sng" algn="ctr">
                       <a:solidFill>
-                        <a:srgbClr val="D1EBF0"/>
+                        <a:srgbClr val="D1F3FA"/>
                       </a:solidFill>
                       <a:prstDash val="solid"/>
                     </a:lnL>
                     <a:lnR w="9525" cap="flat" cmpd="sng" algn="ctr">
                       <a:solidFill>
-                        <a:srgbClr val="D1EBF0"/>
+                        <a:srgbClr val="D1F3FA"/>
                       </a:solidFill>
                       <a:prstDash val="solid"/>
                     </a:lnR>
                     <a:lnT w="9525" cap="flat" cmpd="sng" algn="ctr">
                       <a:solidFill>
-                        <a:srgbClr val="D1EBF0"/>
+                        <a:srgbClr val="D1F3FA"/>
                       </a:solidFill>
                       <a:prstDash val="solid"/>
                     </a:lnT>
                     <a:lnB w="9525" cap="flat" cmpd="sng" algn="ctr">
                       <a:solidFill>
-                        <a:srgbClr val="D1EBF0"/>
+                        <a:srgbClr val="D1F3FA"/>
                       </a:solidFill>
                       <a:prstDash val="solid"/>
                     </a:lnB>
@@ -5065,25 +5065,25 @@
                   <a:tcPr anchor="ctr" marL="73152" marR="73152">
                     <a:lnL w="9525" cap="flat" cmpd="sng" algn="ctr">
                       <a:solidFill>
-                        <a:srgbClr val="D1EBF0"/>
+                        <a:srgbClr val="D1F3FA"/>
                       </a:solidFill>
                       <a:prstDash val="solid"/>
                     </a:lnL>
                     <a:lnR w="9525" cap="flat" cmpd="sng" algn="ctr">
                       <a:solidFill>
-                        <a:srgbClr val="D1EBF0"/>
+                        <a:srgbClr val="D1F3FA"/>
                       </a:solidFill>
                       <a:prstDash val="solid"/>
                     </a:lnR>
                     <a:lnT w="9525" cap="flat" cmpd="sng" algn="ctr">
                       <a:solidFill>
-                        <a:srgbClr val="D1EBF0"/>
+                        <a:srgbClr val="D1F3FA"/>
                       </a:solidFill>
                       <a:prstDash val="solid"/>
                     </a:lnT>
                     <a:lnB w="9525" cap="flat" cmpd="sng" algn="ctr">
                       <a:solidFill>
-                        <a:srgbClr val="D1EBF0"/>
+                        <a:srgbClr val="D1F3FA"/>
                       </a:solidFill>
                       <a:prstDash val="solid"/>
                     </a:lnB>
@@ -5111,25 +5111,25 @@
                   <a:tcPr anchor="ctr" marL="73152" marR="73152">
                     <a:lnL w="9525" cap="flat" cmpd="sng" algn="ctr">
                       <a:solidFill>
-                        <a:srgbClr val="D1EBF0"/>
+                        <a:srgbClr val="D1F3FA"/>
                       </a:solidFill>
                       <a:prstDash val="solid"/>
                     </a:lnL>
                     <a:lnR w="9525" cap="flat" cmpd="sng" algn="ctr">
                       <a:solidFill>
-                        <a:srgbClr val="D1EBF0"/>
+                        <a:srgbClr val="D1F3FA"/>
                       </a:solidFill>
                       <a:prstDash val="solid"/>
                     </a:lnR>
                     <a:lnT w="9525" cap="flat" cmpd="sng" algn="ctr">
                       <a:solidFill>
-                        <a:srgbClr val="D1EBF0"/>
+                        <a:srgbClr val="D1F3FA"/>
                       </a:solidFill>
                       <a:prstDash val="solid"/>
                     </a:lnT>
                     <a:lnB w="9525" cap="flat" cmpd="sng" algn="ctr">
                       <a:solidFill>
-                        <a:srgbClr val="D1EBF0"/>
+                        <a:srgbClr val="D1F3FA"/>
                       </a:solidFill>
                       <a:prstDash val="solid"/>
                     </a:lnB>
@@ -5159,30 +5159,30 @@
                   <a:tcPr anchor="ctr" marL="73152" marR="73152">
                     <a:lnL w="9525" cap="flat" cmpd="sng" algn="ctr">
                       <a:solidFill>
-                        <a:srgbClr val="D1EBF0"/>
+                        <a:srgbClr val="D1F3FA"/>
                       </a:solidFill>
                       <a:prstDash val="solid"/>
                     </a:lnL>
                     <a:lnR w="9525" cap="flat" cmpd="sng" algn="ctr">
                       <a:solidFill>
-                        <a:srgbClr val="D1EBF0"/>
+                        <a:srgbClr val="D1F3FA"/>
                       </a:solidFill>
                       <a:prstDash val="solid"/>
                     </a:lnR>
                     <a:lnT w="9525" cap="flat" cmpd="sng" algn="ctr">
                       <a:solidFill>
-                        <a:srgbClr val="D1EBF0"/>
+                        <a:srgbClr val="D1F3FA"/>
                       </a:solidFill>
                       <a:prstDash val="solid"/>
                     </a:lnT>
                     <a:lnB w="9525" cap="flat" cmpd="sng" algn="ctr">
                       <a:solidFill>
-                        <a:srgbClr val="D1EBF0"/>
+                        <a:srgbClr val="D1F3FA"/>
                       </a:solidFill>
                       <a:prstDash val="solid"/>
                     </a:lnB>
                     <a:solidFill>
-                      <a:srgbClr val="F0F8F9"/>
+                      <a:srgbClr val="EEFAFC"/>
                     </a:solidFill>
                   </a:tcPr>
                 </a:tc>
@@ -5205,30 +5205,30 @@
                   <a:tcPr anchor="ctr" marL="73152" marR="73152">
                     <a:lnL w="9525" cap="flat" cmpd="sng" algn="ctr">
                       <a:solidFill>
-                        <a:srgbClr val="D1EBF0"/>
+                        <a:srgbClr val="D1F3FA"/>
                       </a:solidFill>
                       <a:prstDash val="solid"/>
                     </a:lnL>
                     <a:lnR w="9525" cap="flat" cmpd="sng" algn="ctr">
                       <a:solidFill>
-                        <a:srgbClr val="D1EBF0"/>
+                        <a:srgbClr val="D1F3FA"/>
                       </a:solidFill>
                       <a:prstDash val="solid"/>
                     </a:lnR>
                     <a:lnT w="9525" cap="flat" cmpd="sng" algn="ctr">
                       <a:solidFill>
-                        <a:srgbClr val="D1EBF0"/>
+                        <a:srgbClr val="D1F3FA"/>
                       </a:solidFill>
                       <a:prstDash val="solid"/>
                     </a:lnT>
                     <a:lnB w="9525" cap="flat" cmpd="sng" algn="ctr">
                       <a:solidFill>
-                        <a:srgbClr val="D1EBF0"/>
+                        <a:srgbClr val="D1F3FA"/>
                       </a:solidFill>
                       <a:prstDash val="solid"/>
                     </a:lnB>
                     <a:solidFill>
-                      <a:srgbClr val="F0F8F9"/>
+                      <a:srgbClr val="EEFAFC"/>
                     </a:solidFill>
                   </a:tcPr>
                 </a:tc>
@@ -5251,30 +5251,30 @@
                   <a:tcPr anchor="ctr" marL="73152" marR="73152">
                     <a:lnL w="9525" cap="flat" cmpd="sng" algn="ctr">
                       <a:solidFill>
-                        <a:srgbClr val="D1EBF0"/>
+                        <a:srgbClr val="D1F3FA"/>
                       </a:solidFill>
                       <a:prstDash val="solid"/>
                     </a:lnL>
                     <a:lnR w="9525" cap="flat" cmpd="sng" algn="ctr">
                       <a:solidFill>
-                        <a:srgbClr val="D1EBF0"/>
+                        <a:srgbClr val="D1F3FA"/>
                       </a:solidFill>
                       <a:prstDash val="solid"/>
                     </a:lnR>
                     <a:lnT w="9525" cap="flat" cmpd="sng" algn="ctr">
                       <a:solidFill>
-                        <a:srgbClr val="D1EBF0"/>
+                        <a:srgbClr val="D1F3FA"/>
                       </a:solidFill>
                       <a:prstDash val="solid"/>
                     </a:lnT>
                     <a:lnB w="9525" cap="flat" cmpd="sng" algn="ctr">
                       <a:solidFill>
-                        <a:srgbClr val="D1EBF0"/>
+                        <a:srgbClr val="D1F3FA"/>
                       </a:solidFill>
                       <a:prstDash val="solid"/>
                     </a:lnB>
                     <a:solidFill>
-                      <a:srgbClr val="F0F8F9"/>
+                      <a:srgbClr val="EEFAFC"/>
                     </a:solidFill>
                   </a:tcPr>
                 </a:tc>
@@ -5297,30 +5297,30 @@
                   <a:tcPr anchor="ctr" marL="73152" marR="73152">
                     <a:lnL w="9525" cap="flat" cmpd="sng" algn="ctr">
                       <a:solidFill>
-                        <a:srgbClr val="D1EBF0"/>
+                        <a:srgbClr val="D1F3FA"/>
                       </a:solidFill>
                       <a:prstDash val="solid"/>
                     </a:lnL>
                     <a:lnR w="9525" cap="flat" cmpd="sng" algn="ctr">
                       <a:solidFill>
-                        <a:srgbClr val="D1EBF0"/>
+                        <a:srgbClr val="D1F3FA"/>
                       </a:solidFill>
                       <a:prstDash val="solid"/>
                     </a:lnR>
                     <a:lnT w="9525" cap="flat" cmpd="sng" algn="ctr">
                       <a:solidFill>
-                        <a:srgbClr val="D1EBF0"/>
+                        <a:srgbClr val="D1F3FA"/>
                       </a:solidFill>
                       <a:prstDash val="solid"/>
                     </a:lnT>
                     <a:lnB w="9525" cap="flat" cmpd="sng" algn="ctr">
                       <a:solidFill>
-                        <a:srgbClr val="D1EBF0"/>
+                        <a:srgbClr val="D1F3FA"/>
                       </a:solidFill>
                       <a:prstDash val="solid"/>
                     </a:lnB>
                     <a:solidFill>
-                      <a:srgbClr val="F0F8F9"/>
+                      <a:srgbClr val="EEFAFC"/>
                     </a:solidFill>
                   </a:tcPr>
                 </a:tc>
@@ -5343,30 +5343,30 @@
                   <a:tcPr anchor="ctr" marL="73152" marR="73152">
                     <a:lnL w="9525" cap="flat" cmpd="sng" algn="ctr">
                       <a:solidFill>
-                        <a:srgbClr val="D1EBF0"/>
+                        <a:srgbClr val="D1F3FA"/>
                       </a:solidFill>
                       <a:prstDash val="solid"/>
                     </a:lnL>
                     <a:lnR w="9525" cap="flat" cmpd="sng" algn="ctr">
                       <a:solidFill>
-                        <a:srgbClr val="D1EBF0"/>
+                        <a:srgbClr val="D1F3FA"/>
                       </a:solidFill>
                       <a:prstDash val="solid"/>
                     </a:lnR>
                     <a:lnT w="9525" cap="flat" cmpd="sng" algn="ctr">
                       <a:solidFill>
-                        <a:srgbClr val="D1EBF0"/>
+                        <a:srgbClr val="D1F3FA"/>
                       </a:solidFill>
                       <a:prstDash val="solid"/>
                     </a:lnT>
                     <a:lnB w="9525" cap="flat" cmpd="sng" algn="ctr">
                       <a:solidFill>
-                        <a:srgbClr val="D1EBF0"/>
+                        <a:srgbClr val="D1F3FA"/>
                       </a:solidFill>
                       <a:prstDash val="solid"/>
                     </a:lnB>
                     <a:solidFill>
-                      <a:srgbClr val="F0F8F9"/>
+                      <a:srgbClr val="EEFAFC"/>
                     </a:solidFill>
                   </a:tcPr>
                 </a:tc>
@@ -5391,25 +5391,25 @@
                   <a:tcPr anchor="ctr" marL="73152" marR="73152">
                     <a:lnL w="9525" cap="flat" cmpd="sng" algn="ctr">
                       <a:solidFill>
-                        <a:srgbClr val="D1EBF0"/>
+                        <a:srgbClr val="D1F3FA"/>
                       </a:solidFill>
                       <a:prstDash val="solid"/>
                     </a:lnL>
                     <a:lnR w="9525" cap="flat" cmpd="sng" algn="ctr">
                       <a:solidFill>
-                        <a:srgbClr val="D1EBF0"/>
+                        <a:srgbClr val="D1F3FA"/>
                       </a:solidFill>
                       <a:prstDash val="solid"/>
                     </a:lnR>
                     <a:lnT w="9525" cap="flat" cmpd="sng" algn="ctr">
                       <a:solidFill>
-                        <a:srgbClr val="D1EBF0"/>
+                        <a:srgbClr val="D1F3FA"/>
                       </a:solidFill>
                       <a:prstDash val="solid"/>
                     </a:lnT>
                     <a:lnB w="9525" cap="flat" cmpd="sng" algn="ctr">
                       <a:solidFill>
-                        <a:srgbClr val="D1EBF0"/>
+                        <a:srgbClr val="D1F3FA"/>
                       </a:solidFill>
                       <a:prstDash val="solid"/>
                     </a:lnB>
@@ -5437,25 +5437,25 @@
                   <a:tcPr anchor="ctr" marL="73152" marR="73152">
                     <a:lnL w="9525" cap="flat" cmpd="sng" algn="ctr">
                       <a:solidFill>
-                        <a:srgbClr val="D1EBF0"/>
+                        <a:srgbClr val="D1F3FA"/>
                       </a:solidFill>
                       <a:prstDash val="solid"/>
                     </a:lnL>
                     <a:lnR w="9525" cap="flat" cmpd="sng" algn="ctr">
                       <a:solidFill>
-                        <a:srgbClr val="D1EBF0"/>
+                        <a:srgbClr val="D1F3FA"/>
                       </a:solidFill>
                       <a:prstDash val="solid"/>
                     </a:lnR>
                     <a:lnT w="9525" cap="flat" cmpd="sng" algn="ctr">
                       <a:solidFill>
-                        <a:srgbClr val="D1EBF0"/>
+                        <a:srgbClr val="D1F3FA"/>
                       </a:solidFill>
                       <a:prstDash val="solid"/>
                     </a:lnT>
                     <a:lnB w="9525" cap="flat" cmpd="sng" algn="ctr">
                       <a:solidFill>
-                        <a:srgbClr val="D1EBF0"/>
+                        <a:srgbClr val="D1F3FA"/>
                       </a:solidFill>
                       <a:prstDash val="solid"/>
                     </a:lnB>
@@ -5483,25 +5483,25 @@
                   <a:tcPr anchor="ctr" marL="73152" marR="73152">
                     <a:lnL w="9525" cap="flat" cmpd="sng" algn="ctr">
                       <a:solidFill>
-                        <a:srgbClr val="D1EBF0"/>
+                        <a:srgbClr val="D1F3FA"/>
                       </a:solidFill>
                       <a:prstDash val="solid"/>
                     </a:lnL>
                     <a:lnR w="9525" cap="flat" cmpd="sng" algn="ctr">
                       <a:solidFill>
-                        <a:srgbClr val="D1EBF0"/>
+                        <a:srgbClr val="D1F3FA"/>
                       </a:solidFill>
                       <a:prstDash val="solid"/>
                     </a:lnR>
                     <a:lnT w="9525" cap="flat" cmpd="sng" algn="ctr">
                       <a:solidFill>
-                        <a:srgbClr val="D1EBF0"/>
+                        <a:srgbClr val="D1F3FA"/>
                       </a:solidFill>
                       <a:prstDash val="solid"/>
                     </a:lnT>
                     <a:lnB w="9525" cap="flat" cmpd="sng" algn="ctr">
                       <a:solidFill>
-                        <a:srgbClr val="D1EBF0"/>
+                        <a:srgbClr val="D1F3FA"/>
                       </a:solidFill>
                       <a:prstDash val="solid"/>
                     </a:lnB>
@@ -5529,25 +5529,25 @@
                   <a:tcPr anchor="ctr" marL="73152" marR="73152">
                     <a:lnL w="9525" cap="flat" cmpd="sng" algn="ctr">
                       <a:solidFill>
-                        <a:srgbClr val="D1EBF0"/>
+                        <a:srgbClr val="D1F3FA"/>
                       </a:solidFill>
                       <a:prstDash val="solid"/>
                     </a:lnL>
                     <a:lnR w="9525" cap="flat" cmpd="sng" algn="ctr">
                       <a:solidFill>
-                        <a:srgbClr val="D1EBF0"/>
+                        <a:srgbClr val="D1F3FA"/>
                       </a:solidFill>
                       <a:prstDash val="solid"/>
                     </a:lnR>
                     <a:lnT w="9525" cap="flat" cmpd="sng" algn="ctr">
                       <a:solidFill>
-                        <a:srgbClr val="D1EBF0"/>
+                        <a:srgbClr val="D1F3FA"/>
                       </a:solidFill>
                       <a:prstDash val="solid"/>
                     </a:lnT>
                     <a:lnB w="9525" cap="flat" cmpd="sng" algn="ctr">
                       <a:solidFill>
-                        <a:srgbClr val="D1EBF0"/>
+                        <a:srgbClr val="D1F3FA"/>
                       </a:solidFill>
                       <a:prstDash val="solid"/>
                     </a:lnB>
@@ -5575,25 +5575,25 @@
                   <a:tcPr anchor="ctr" marL="73152" marR="73152">
                     <a:lnL w="9525" cap="flat" cmpd="sng" algn="ctr">
                       <a:solidFill>
-                        <a:srgbClr val="D1EBF0"/>
+                        <a:srgbClr val="D1F3FA"/>
                       </a:solidFill>
                       <a:prstDash val="solid"/>
                     </a:lnL>
                     <a:lnR w="9525" cap="flat" cmpd="sng" algn="ctr">
                       <a:solidFill>
-                        <a:srgbClr val="D1EBF0"/>
+                        <a:srgbClr val="D1F3FA"/>
                       </a:solidFill>
                       <a:prstDash val="solid"/>
                     </a:lnR>
                     <a:lnT w="9525" cap="flat" cmpd="sng" algn="ctr">
                       <a:solidFill>
-                        <a:srgbClr val="D1EBF0"/>
+                        <a:srgbClr val="D1F3FA"/>
                       </a:solidFill>
                       <a:prstDash val="solid"/>
                     </a:lnT>
                     <a:lnB w="9525" cap="flat" cmpd="sng" algn="ctr">
                       <a:solidFill>
-                        <a:srgbClr val="D1EBF0"/>
+                        <a:srgbClr val="D1F3FA"/>
                       </a:solidFill>
                       <a:prstDash val="solid"/>
                     </a:lnB>
@@ -5623,30 +5623,30 @@
                   <a:tcPr anchor="ctr" marL="73152" marR="73152">
                     <a:lnL w="9525" cap="flat" cmpd="sng" algn="ctr">
                       <a:solidFill>
-                        <a:srgbClr val="D1EBF0"/>
+                        <a:srgbClr val="D1F3FA"/>
                       </a:solidFill>
                       <a:prstDash val="solid"/>
                     </a:lnL>
                     <a:lnR w="9525" cap="flat" cmpd="sng" algn="ctr">
                       <a:solidFill>
-                        <a:srgbClr val="D1EBF0"/>
+                        <a:srgbClr val="D1F3FA"/>
                       </a:solidFill>
                       <a:prstDash val="solid"/>
                     </a:lnR>
                     <a:lnT w="9525" cap="flat" cmpd="sng" algn="ctr">
                       <a:solidFill>
-                        <a:srgbClr val="D1EBF0"/>
+                        <a:srgbClr val="D1F3FA"/>
                       </a:solidFill>
                       <a:prstDash val="solid"/>
                     </a:lnT>
                     <a:lnB w="9525" cap="flat" cmpd="sng" algn="ctr">
                       <a:solidFill>
-                        <a:srgbClr val="D1EBF0"/>
+                        <a:srgbClr val="D1F3FA"/>
                       </a:solidFill>
                       <a:prstDash val="solid"/>
                     </a:lnB>
                     <a:solidFill>
-                      <a:srgbClr val="F0F8F9"/>
+                      <a:srgbClr val="EEFAFC"/>
                     </a:solidFill>
                   </a:tcPr>
                 </a:tc>
@@ -5669,30 +5669,30 @@
                   <a:tcPr anchor="ctr" marL="73152" marR="73152">
                     <a:lnL w="9525" cap="flat" cmpd="sng" algn="ctr">
                       <a:solidFill>
-                        <a:srgbClr val="D1EBF0"/>
+                        <a:srgbClr val="D1F3FA"/>
                       </a:solidFill>
                       <a:prstDash val="solid"/>
                     </a:lnL>
                     <a:lnR w="9525" cap="flat" cmpd="sng" algn="ctr">
                       <a:solidFill>
-                        <a:srgbClr val="D1EBF0"/>
+                        <a:srgbClr val="D1F3FA"/>
                       </a:solidFill>
                       <a:prstDash val="solid"/>
                     </a:lnR>
                     <a:lnT w="9525" cap="flat" cmpd="sng" algn="ctr">
                       <a:solidFill>
-                        <a:srgbClr val="D1EBF0"/>
+                        <a:srgbClr val="D1F3FA"/>
                       </a:solidFill>
                       <a:prstDash val="solid"/>
                     </a:lnT>
                     <a:lnB w="9525" cap="flat" cmpd="sng" algn="ctr">
                       <a:solidFill>
-                        <a:srgbClr val="D1EBF0"/>
+                        <a:srgbClr val="D1F3FA"/>
                       </a:solidFill>
                       <a:prstDash val="solid"/>
                     </a:lnB>
                     <a:solidFill>
-                      <a:srgbClr val="F0F8F9"/>
+                      <a:srgbClr val="EEFAFC"/>
                     </a:solidFill>
                   </a:tcPr>
                 </a:tc>
@@ -5715,30 +5715,30 @@
                   <a:tcPr anchor="ctr" marL="73152" marR="73152">
                     <a:lnL w="9525" cap="flat" cmpd="sng" algn="ctr">
                       <a:solidFill>
-                        <a:srgbClr val="D1EBF0"/>
+                        <a:srgbClr val="D1F3FA"/>
                       </a:solidFill>
                       <a:prstDash val="solid"/>
                     </a:lnL>
                     <a:lnR w="9525" cap="flat" cmpd="sng" algn="ctr">
                       <a:solidFill>
-                        <a:srgbClr val="D1EBF0"/>
+                        <a:srgbClr val="D1F3FA"/>
                       </a:solidFill>
                       <a:prstDash val="solid"/>
                     </a:lnR>
                     <a:lnT w="9525" cap="flat" cmpd="sng" algn="ctr">
                       <a:solidFill>
-                        <a:srgbClr val="D1EBF0"/>
+                        <a:srgbClr val="D1F3FA"/>
                       </a:solidFill>
                       <a:prstDash val="solid"/>
                     </a:lnT>
                     <a:lnB w="9525" cap="flat" cmpd="sng" algn="ctr">
                       <a:solidFill>
-                        <a:srgbClr val="D1EBF0"/>
+                        <a:srgbClr val="D1F3FA"/>
                       </a:solidFill>
                       <a:prstDash val="solid"/>
                     </a:lnB>
                     <a:solidFill>
-                      <a:srgbClr val="F0F8F9"/>
+                      <a:srgbClr val="EEFAFC"/>
                     </a:solidFill>
                   </a:tcPr>
                 </a:tc>
@@ -5761,30 +5761,30 @@
                   <a:tcPr anchor="ctr" marL="73152" marR="73152">
                     <a:lnL w="9525" cap="flat" cmpd="sng" algn="ctr">
                       <a:solidFill>
-                        <a:srgbClr val="D1EBF0"/>
+                        <a:srgbClr val="D1F3FA"/>
                       </a:solidFill>
                       <a:prstDash val="solid"/>
                     </a:lnL>
                     <a:lnR w="9525" cap="flat" cmpd="sng" algn="ctr">
                       <a:solidFill>
-                        <a:srgbClr val="D1EBF0"/>
+                        <a:srgbClr val="D1F3FA"/>
                       </a:solidFill>
                       <a:prstDash val="solid"/>
                     </a:lnR>
                     <a:lnT w="9525" cap="flat" cmpd="sng" algn="ctr">
                       <a:solidFill>
-                        <a:srgbClr val="D1EBF0"/>
+                        <a:srgbClr val="D1F3FA"/>
                       </a:solidFill>
                       <a:prstDash val="solid"/>
                     </a:lnT>
                     <a:lnB w="9525" cap="flat" cmpd="sng" algn="ctr">
                       <a:solidFill>
-                        <a:srgbClr val="D1EBF0"/>
+                        <a:srgbClr val="D1F3FA"/>
                       </a:solidFill>
                       <a:prstDash val="solid"/>
                     </a:lnB>
                     <a:solidFill>
-                      <a:srgbClr val="F0F8F9"/>
+                      <a:srgbClr val="EEFAFC"/>
                     </a:solidFill>
                   </a:tcPr>
                 </a:tc>
@@ -5807,30 +5807,30 @@
                   <a:tcPr anchor="ctr" marL="73152" marR="73152">
                     <a:lnL w="9525" cap="flat" cmpd="sng" algn="ctr">
                       <a:solidFill>
-                        <a:srgbClr val="D1EBF0"/>
+                        <a:srgbClr val="D1F3FA"/>
                       </a:solidFill>
                       <a:prstDash val="solid"/>
                     </a:lnL>
                     <a:lnR w="9525" cap="flat" cmpd="sng" algn="ctr">
                       <a:solidFill>
-                        <a:srgbClr val="D1EBF0"/>
+                        <a:srgbClr val="D1F3FA"/>
                       </a:solidFill>
                       <a:prstDash val="solid"/>
                     </a:lnR>
                     <a:lnT w="9525" cap="flat" cmpd="sng" algn="ctr">
                       <a:solidFill>
-                        <a:srgbClr val="D1EBF0"/>
+                        <a:srgbClr val="D1F3FA"/>
                       </a:solidFill>
                       <a:prstDash val="solid"/>
                     </a:lnT>
                     <a:lnB w="9525" cap="flat" cmpd="sng" algn="ctr">
                       <a:solidFill>
-                        <a:srgbClr val="D1EBF0"/>
+                        <a:srgbClr val="D1F3FA"/>
                       </a:solidFill>
                       <a:prstDash val="solid"/>
                     </a:lnB>
                     <a:solidFill>
-                      <a:srgbClr val="F0F8F9"/>
+                      <a:srgbClr val="EEFAFC"/>
                     </a:solidFill>
                   </a:tcPr>
                 </a:tc>
@@ -5853,7 +5853,7 @@
     <p:bg>
       <p:bgPr>
         <a:solidFill>
-          <a:srgbClr val="F0F8F9"/>
+          <a:srgbClr val="EEFAFC"/>
         </a:solidFill>
         <a:effectLst/>
       </p:bgPr>
@@ -5880,7 +5880,7 @@
             <a:avLst/>
           </a:prstGeom>
           <a:solidFill>
-            <a:srgbClr val="D1EBF0"/>
+            <a:srgbClr val="D1F3FA"/>
           </a:solidFill>
           <a:ln>
             <a:noFill/>
@@ -5909,7 +5909,7 @@
             <a:avLst/>
           </a:prstGeom>
           <a:solidFill>
-            <a:srgbClr val="3F95A6"/>
+            <a:srgbClr val="26AAC5"/>
           </a:solidFill>
           <a:ln>
             <a:noFill/>
@@ -5953,7 +5953,7 @@
             <a:r>
               <a:rPr sz="3000" b="1" i="0">
                 <a:solidFill>
-                  <a:srgbClr val="23535C"/>
+                  <a:srgbClr val="11525F"/>
                 </a:solidFill>
               </a:rPr>
               <a:t>보장 항목 체크</a:t>
@@ -6005,30 +6005,30 @@
                   <a:tcPr anchor="ctr" marL="73152" marR="73152">
                     <a:lnL w="9525" cap="flat" cmpd="sng" algn="ctr">
                       <a:solidFill>
-                        <a:srgbClr val="3F95A6"/>
+                        <a:srgbClr val="26AAC5"/>
                       </a:solidFill>
                       <a:prstDash val="solid"/>
                     </a:lnL>
                     <a:lnR w="9525" cap="flat" cmpd="sng" algn="ctr">
                       <a:solidFill>
-                        <a:srgbClr val="3F95A6"/>
+                        <a:srgbClr val="26AAC5"/>
                       </a:solidFill>
                       <a:prstDash val="solid"/>
                     </a:lnR>
                     <a:lnT w="9525" cap="flat" cmpd="sng" algn="ctr">
                       <a:solidFill>
-                        <a:srgbClr val="3F95A6"/>
+                        <a:srgbClr val="26AAC5"/>
                       </a:solidFill>
                       <a:prstDash val="solid"/>
                     </a:lnT>
                     <a:lnB w="9525" cap="flat" cmpd="sng" algn="ctr">
                       <a:solidFill>
-                        <a:srgbClr val="3F95A6"/>
+                        <a:srgbClr val="26AAC5"/>
                       </a:solidFill>
                       <a:prstDash val="solid"/>
                     </a:lnB>
                     <a:solidFill>
-                      <a:srgbClr val="3F95A6"/>
+                      <a:srgbClr val="26AAC5"/>
                     </a:solidFill>
                   </a:tcPr>
                 </a:tc>
@@ -6051,30 +6051,30 @@
                   <a:tcPr anchor="ctr" marL="73152" marR="73152">
                     <a:lnL w="9525" cap="flat" cmpd="sng" algn="ctr">
                       <a:solidFill>
-                        <a:srgbClr val="3F95A6"/>
+                        <a:srgbClr val="26AAC5"/>
                       </a:solidFill>
                       <a:prstDash val="solid"/>
                     </a:lnL>
                     <a:lnR w="9525" cap="flat" cmpd="sng" algn="ctr">
                       <a:solidFill>
-                        <a:srgbClr val="3F95A6"/>
+                        <a:srgbClr val="26AAC5"/>
                       </a:solidFill>
                       <a:prstDash val="solid"/>
                     </a:lnR>
                     <a:lnT w="9525" cap="flat" cmpd="sng" algn="ctr">
                       <a:solidFill>
-                        <a:srgbClr val="3F95A6"/>
+                        <a:srgbClr val="26AAC5"/>
                       </a:solidFill>
                       <a:prstDash val="solid"/>
                     </a:lnT>
                     <a:lnB w="9525" cap="flat" cmpd="sng" algn="ctr">
                       <a:solidFill>
-                        <a:srgbClr val="3F95A6"/>
+                        <a:srgbClr val="26AAC5"/>
                       </a:solidFill>
                       <a:prstDash val="solid"/>
                     </a:lnB>
                     <a:solidFill>
-                      <a:srgbClr val="3F95A6"/>
+                      <a:srgbClr val="26AAC5"/>
                     </a:solidFill>
                   </a:tcPr>
                 </a:tc>
@@ -6097,30 +6097,30 @@
                   <a:tcPr anchor="ctr" marL="73152" marR="73152">
                     <a:lnL w="9525" cap="flat" cmpd="sng" algn="ctr">
                       <a:solidFill>
-                        <a:srgbClr val="3F95A6"/>
+                        <a:srgbClr val="26AAC5"/>
                       </a:solidFill>
                       <a:prstDash val="solid"/>
                     </a:lnL>
                     <a:lnR w="9525" cap="flat" cmpd="sng" algn="ctr">
                       <a:solidFill>
-                        <a:srgbClr val="3F95A6"/>
+                        <a:srgbClr val="26AAC5"/>
                       </a:solidFill>
                       <a:prstDash val="solid"/>
                     </a:lnR>
                     <a:lnT w="9525" cap="flat" cmpd="sng" algn="ctr">
                       <a:solidFill>
-                        <a:srgbClr val="3F95A6"/>
+                        <a:srgbClr val="26AAC5"/>
                       </a:solidFill>
                       <a:prstDash val="solid"/>
                     </a:lnT>
                     <a:lnB w="9525" cap="flat" cmpd="sng" algn="ctr">
                       <a:solidFill>
-                        <a:srgbClr val="3F95A6"/>
+                        <a:srgbClr val="26AAC5"/>
                       </a:solidFill>
                       <a:prstDash val="solid"/>
                     </a:lnB>
                     <a:solidFill>
-                      <a:srgbClr val="3F95A6"/>
+                      <a:srgbClr val="26AAC5"/>
                     </a:solidFill>
                   </a:tcPr>
                 </a:tc>
@@ -6143,30 +6143,30 @@
                   <a:tcPr anchor="ctr" marL="73152" marR="73152">
                     <a:lnL w="9525" cap="flat" cmpd="sng" algn="ctr">
                       <a:solidFill>
-                        <a:srgbClr val="3F95A6"/>
+                        <a:srgbClr val="26AAC5"/>
                       </a:solidFill>
                       <a:prstDash val="solid"/>
                     </a:lnL>
                     <a:lnR w="9525" cap="flat" cmpd="sng" algn="ctr">
                       <a:solidFill>
-                        <a:srgbClr val="3F95A6"/>
+                        <a:srgbClr val="26AAC5"/>
                       </a:solidFill>
                       <a:prstDash val="solid"/>
                     </a:lnR>
                     <a:lnT w="9525" cap="flat" cmpd="sng" algn="ctr">
                       <a:solidFill>
-                        <a:srgbClr val="3F95A6"/>
+                        <a:srgbClr val="26AAC5"/>
                       </a:solidFill>
                       <a:prstDash val="solid"/>
                     </a:lnT>
                     <a:lnB w="9525" cap="flat" cmpd="sng" algn="ctr">
                       <a:solidFill>
-                        <a:srgbClr val="3F95A6"/>
+                        <a:srgbClr val="26AAC5"/>
                       </a:solidFill>
                       <a:prstDash val="solid"/>
                     </a:lnB>
                     <a:solidFill>
-                      <a:srgbClr val="3F95A6"/>
+                      <a:srgbClr val="26AAC5"/>
                     </a:solidFill>
                   </a:tcPr>
                 </a:tc>
@@ -6181,7 +6181,7 @@
                       <a:r>
                         <a:rPr sz="1400" b="1">
                           <a:solidFill>
-                            <a:srgbClr val="23535C"/>
+                            <a:srgbClr val="11525F"/>
                           </a:solidFill>
                         </a:rPr>
                         <a:t>사망·재해</a:t>
@@ -6191,30 +6191,30 @@
                   <a:tcPr anchor="ctr" marL="73152" marR="73152">
                     <a:lnL w="9525" cap="flat" cmpd="sng" algn="ctr">
                       <a:solidFill>
-                        <a:srgbClr val="D1EBF0"/>
+                        <a:srgbClr val="D1F3FA"/>
                       </a:solidFill>
                       <a:prstDash val="solid"/>
                     </a:lnL>
                     <a:lnR w="9525" cap="flat" cmpd="sng" algn="ctr">
                       <a:solidFill>
-                        <a:srgbClr val="D1EBF0"/>
+                        <a:srgbClr val="D1F3FA"/>
                       </a:solidFill>
                       <a:prstDash val="solid"/>
                     </a:lnR>
                     <a:lnT w="9525" cap="flat" cmpd="sng" algn="ctr">
                       <a:solidFill>
-                        <a:srgbClr val="D1EBF0"/>
+                        <a:srgbClr val="D1F3FA"/>
                       </a:solidFill>
                       <a:prstDash val="solid"/>
                     </a:lnT>
                     <a:lnB w="9525" cap="flat" cmpd="sng" algn="ctr">
                       <a:solidFill>
-                        <a:srgbClr val="D1EBF0"/>
+                        <a:srgbClr val="D1F3FA"/>
                       </a:solidFill>
                       <a:prstDash val="solid"/>
                     </a:lnB>
                     <a:solidFill>
-                      <a:srgbClr val="D1EBF0"/>
+                      <a:srgbClr val="D1F3FA"/>
                     </a:solidFill>
                   </a:tcPr>
                 </a:tc>
@@ -6237,25 +6237,25 @@
                   <a:tcPr anchor="ctr" marL="73152" marR="73152">
                     <a:lnL w="9525" cap="flat" cmpd="sng" algn="ctr">
                       <a:solidFill>
-                        <a:srgbClr val="D1EBF0"/>
+                        <a:srgbClr val="D1F3FA"/>
                       </a:solidFill>
                       <a:prstDash val="solid"/>
                     </a:lnL>
                     <a:lnR w="9525" cap="flat" cmpd="sng" algn="ctr">
                       <a:solidFill>
-                        <a:srgbClr val="D1EBF0"/>
+                        <a:srgbClr val="D1F3FA"/>
                       </a:solidFill>
                       <a:prstDash val="solid"/>
                     </a:lnR>
                     <a:lnT w="9525" cap="flat" cmpd="sng" algn="ctr">
                       <a:solidFill>
-                        <a:srgbClr val="D1EBF0"/>
+                        <a:srgbClr val="D1F3FA"/>
                       </a:solidFill>
                       <a:prstDash val="solid"/>
                     </a:lnT>
                     <a:lnB w="9525" cap="flat" cmpd="sng" algn="ctr">
                       <a:solidFill>
-                        <a:srgbClr val="D1EBF0"/>
+                        <a:srgbClr val="D1F3FA"/>
                       </a:solidFill>
                       <a:prstDash val="solid"/>
                     </a:lnB>
@@ -6283,25 +6283,25 @@
                   <a:tcPr anchor="ctr" marL="73152" marR="73152">
                     <a:lnL w="9525" cap="flat" cmpd="sng" algn="ctr">
                       <a:solidFill>
-                        <a:srgbClr val="D1EBF0"/>
+                        <a:srgbClr val="D1F3FA"/>
                       </a:solidFill>
                       <a:prstDash val="solid"/>
                     </a:lnL>
                     <a:lnR w="9525" cap="flat" cmpd="sng" algn="ctr">
                       <a:solidFill>
-                        <a:srgbClr val="D1EBF0"/>
+                        <a:srgbClr val="D1F3FA"/>
                       </a:solidFill>
                       <a:prstDash val="solid"/>
                     </a:lnR>
                     <a:lnT w="9525" cap="flat" cmpd="sng" algn="ctr">
                       <a:solidFill>
-                        <a:srgbClr val="D1EBF0"/>
+                        <a:srgbClr val="D1F3FA"/>
                       </a:solidFill>
                       <a:prstDash val="solid"/>
                     </a:lnT>
                     <a:lnB w="9525" cap="flat" cmpd="sng" algn="ctr">
                       <a:solidFill>
-                        <a:srgbClr val="D1EBF0"/>
+                        <a:srgbClr val="D1F3FA"/>
                       </a:solidFill>
                       <a:prstDash val="solid"/>
                     </a:lnB>
@@ -6329,25 +6329,25 @@
                   <a:tcPr anchor="ctr" marL="73152" marR="73152">
                     <a:lnL w="9525" cap="flat" cmpd="sng" algn="ctr">
                       <a:solidFill>
-                        <a:srgbClr val="D1EBF0"/>
+                        <a:srgbClr val="D1F3FA"/>
                       </a:solidFill>
                       <a:prstDash val="solid"/>
                     </a:lnL>
                     <a:lnR w="9525" cap="flat" cmpd="sng" algn="ctr">
                       <a:solidFill>
-                        <a:srgbClr val="D1EBF0"/>
+                        <a:srgbClr val="D1F3FA"/>
                       </a:solidFill>
                       <a:prstDash val="solid"/>
                     </a:lnR>
                     <a:lnT w="9525" cap="flat" cmpd="sng" algn="ctr">
                       <a:solidFill>
-                        <a:srgbClr val="D1EBF0"/>
+                        <a:srgbClr val="D1F3FA"/>
                       </a:solidFill>
                       <a:prstDash val="solid"/>
                     </a:lnT>
                     <a:lnB w="9525" cap="flat" cmpd="sng" algn="ctr">
                       <a:solidFill>
-                        <a:srgbClr val="D1EBF0"/>
+                        <a:srgbClr val="D1F3FA"/>
                       </a:solidFill>
                       <a:prstDash val="solid"/>
                     </a:lnB>
@@ -6367,7 +6367,7 @@
                       <a:r>
                         <a:rPr sz="1400" b="1">
                           <a:solidFill>
-                            <a:srgbClr val="23535C"/>
+                            <a:srgbClr val="11525F"/>
                           </a:solidFill>
                         </a:rPr>
                         <a:t>질병 진단</a:t>
@@ -6377,30 +6377,30 @@
                   <a:tcPr anchor="ctr" marL="73152" marR="73152">
                     <a:lnL w="9525" cap="flat" cmpd="sng" algn="ctr">
                       <a:solidFill>
-                        <a:srgbClr val="D1EBF0"/>
+                        <a:srgbClr val="D1F3FA"/>
                       </a:solidFill>
                       <a:prstDash val="solid"/>
                     </a:lnL>
                     <a:lnR w="9525" cap="flat" cmpd="sng" algn="ctr">
                       <a:solidFill>
-                        <a:srgbClr val="D1EBF0"/>
+                        <a:srgbClr val="D1F3FA"/>
                       </a:solidFill>
                       <a:prstDash val="solid"/>
                     </a:lnR>
                     <a:lnT w="9525" cap="flat" cmpd="sng" algn="ctr">
                       <a:solidFill>
-                        <a:srgbClr val="D1EBF0"/>
+                        <a:srgbClr val="D1F3FA"/>
                       </a:solidFill>
                       <a:prstDash val="solid"/>
                     </a:lnT>
                     <a:lnB w="9525" cap="flat" cmpd="sng" algn="ctr">
                       <a:solidFill>
-                        <a:srgbClr val="D1EBF0"/>
+                        <a:srgbClr val="D1F3FA"/>
                       </a:solidFill>
                       <a:prstDash val="solid"/>
                     </a:lnB>
                     <a:solidFill>
-                      <a:srgbClr val="D1EBF0"/>
+                      <a:srgbClr val="D1F3FA"/>
                     </a:solidFill>
                   </a:tcPr>
                 </a:tc>
@@ -6423,30 +6423,30 @@
                   <a:tcPr anchor="ctr" marL="73152" marR="73152">
                     <a:lnL w="9525" cap="flat" cmpd="sng" algn="ctr">
                       <a:solidFill>
-                        <a:srgbClr val="D1EBF0"/>
+                        <a:srgbClr val="D1F3FA"/>
                       </a:solidFill>
                       <a:prstDash val="solid"/>
                     </a:lnL>
                     <a:lnR w="9525" cap="flat" cmpd="sng" algn="ctr">
                       <a:solidFill>
-                        <a:srgbClr val="D1EBF0"/>
+                        <a:srgbClr val="D1F3FA"/>
                       </a:solidFill>
                       <a:prstDash val="solid"/>
                     </a:lnR>
                     <a:lnT w="9525" cap="flat" cmpd="sng" algn="ctr">
                       <a:solidFill>
-                        <a:srgbClr val="D1EBF0"/>
+                        <a:srgbClr val="D1F3FA"/>
                       </a:solidFill>
                       <a:prstDash val="solid"/>
                     </a:lnT>
                     <a:lnB w="9525" cap="flat" cmpd="sng" algn="ctr">
                       <a:solidFill>
-                        <a:srgbClr val="D1EBF0"/>
+                        <a:srgbClr val="D1F3FA"/>
                       </a:solidFill>
                       <a:prstDash val="solid"/>
                     </a:lnB>
                     <a:solidFill>
-                      <a:srgbClr val="F0F8F9"/>
+                      <a:srgbClr val="EEFAFC"/>
                     </a:solidFill>
                   </a:tcPr>
                 </a:tc>
@@ -6469,30 +6469,30 @@
                   <a:tcPr anchor="ctr" marL="73152" marR="73152">
                     <a:lnL w="9525" cap="flat" cmpd="sng" algn="ctr">
                       <a:solidFill>
-                        <a:srgbClr val="D1EBF0"/>
+                        <a:srgbClr val="D1F3FA"/>
                       </a:solidFill>
                       <a:prstDash val="solid"/>
                     </a:lnL>
                     <a:lnR w="9525" cap="flat" cmpd="sng" algn="ctr">
                       <a:solidFill>
-                        <a:srgbClr val="D1EBF0"/>
+                        <a:srgbClr val="D1F3FA"/>
                       </a:solidFill>
                       <a:prstDash val="solid"/>
                     </a:lnR>
                     <a:lnT w="9525" cap="flat" cmpd="sng" algn="ctr">
                       <a:solidFill>
-                        <a:srgbClr val="D1EBF0"/>
+                        <a:srgbClr val="D1F3FA"/>
                       </a:solidFill>
                       <a:prstDash val="solid"/>
                     </a:lnT>
                     <a:lnB w="9525" cap="flat" cmpd="sng" algn="ctr">
                       <a:solidFill>
-                        <a:srgbClr val="D1EBF0"/>
+                        <a:srgbClr val="D1F3FA"/>
                       </a:solidFill>
                       <a:prstDash val="solid"/>
                     </a:lnB>
                     <a:solidFill>
-                      <a:srgbClr val="F0F8F9"/>
+                      <a:srgbClr val="EEFAFC"/>
                     </a:solidFill>
                   </a:tcPr>
                 </a:tc>
@@ -6515,30 +6515,30 @@
                   <a:tcPr anchor="ctr" marL="73152" marR="73152">
                     <a:lnL w="9525" cap="flat" cmpd="sng" algn="ctr">
                       <a:solidFill>
-                        <a:srgbClr val="D1EBF0"/>
+                        <a:srgbClr val="D1F3FA"/>
                       </a:solidFill>
                       <a:prstDash val="solid"/>
                     </a:lnL>
                     <a:lnR w="9525" cap="flat" cmpd="sng" algn="ctr">
                       <a:solidFill>
-                        <a:srgbClr val="D1EBF0"/>
+                        <a:srgbClr val="D1F3FA"/>
                       </a:solidFill>
                       <a:prstDash val="solid"/>
                     </a:lnR>
                     <a:lnT w="9525" cap="flat" cmpd="sng" algn="ctr">
                       <a:solidFill>
-                        <a:srgbClr val="D1EBF0"/>
+                        <a:srgbClr val="D1F3FA"/>
                       </a:solidFill>
                       <a:prstDash val="solid"/>
                     </a:lnT>
                     <a:lnB w="9525" cap="flat" cmpd="sng" algn="ctr">
                       <a:solidFill>
-                        <a:srgbClr val="D1EBF0"/>
+                        <a:srgbClr val="D1F3FA"/>
                       </a:solidFill>
                       <a:prstDash val="solid"/>
                     </a:lnB>
                     <a:solidFill>
-                      <a:srgbClr val="F0F8F9"/>
+                      <a:srgbClr val="EEFAFC"/>
                     </a:solidFill>
                   </a:tcPr>
                 </a:tc>
@@ -6553,7 +6553,7 @@
                       <a:r>
                         <a:rPr sz="1400" b="1">
                           <a:solidFill>
-                            <a:srgbClr val="23535C"/>
+                            <a:srgbClr val="11525F"/>
                           </a:solidFill>
                         </a:rPr>
                         <a:t>암</a:t>
@@ -6563,30 +6563,30 @@
                   <a:tcPr anchor="ctr" marL="73152" marR="73152">
                     <a:lnL w="9525" cap="flat" cmpd="sng" algn="ctr">
                       <a:solidFill>
-                        <a:srgbClr val="D1EBF0"/>
+                        <a:srgbClr val="D1F3FA"/>
                       </a:solidFill>
                       <a:prstDash val="solid"/>
                     </a:lnL>
                     <a:lnR w="9525" cap="flat" cmpd="sng" algn="ctr">
                       <a:solidFill>
-                        <a:srgbClr val="D1EBF0"/>
+                        <a:srgbClr val="D1F3FA"/>
                       </a:solidFill>
                       <a:prstDash val="solid"/>
                     </a:lnR>
                     <a:lnT w="9525" cap="flat" cmpd="sng" algn="ctr">
                       <a:solidFill>
-                        <a:srgbClr val="D1EBF0"/>
+                        <a:srgbClr val="D1F3FA"/>
                       </a:solidFill>
                       <a:prstDash val="solid"/>
                     </a:lnT>
                     <a:lnB w="9525" cap="flat" cmpd="sng" algn="ctr">
                       <a:solidFill>
-                        <a:srgbClr val="D1EBF0"/>
+                        <a:srgbClr val="D1F3FA"/>
                       </a:solidFill>
                       <a:prstDash val="solid"/>
                     </a:lnB>
                     <a:solidFill>
-                      <a:srgbClr val="D1EBF0"/>
+                      <a:srgbClr val="D1F3FA"/>
                     </a:solidFill>
                   </a:tcPr>
                 </a:tc>
@@ -6609,25 +6609,25 @@
                   <a:tcPr anchor="ctr" marL="73152" marR="73152">
                     <a:lnL w="9525" cap="flat" cmpd="sng" algn="ctr">
                       <a:solidFill>
-                        <a:srgbClr val="D1EBF0"/>
+                        <a:srgbClr val="D1F3FA"/>
                       </a:solidFill>
                       <a:prstDash val="solid"/>
                     </a:lnL>
                     <a:lnR w="9525" cap="flat" cmpd="sng" algn="ctr">
                       <a:solidFill>
-                        <a:srgbClr val="D1EBF0"/>
+                        <a:srgbClr val="D1F3FA"/>
                       </a:solidFill>
                       <a:prstDash val="solid"/>
                     </a:lnR>
                     <a:lnT w="9525" cap="flat" cmpd="sng" algn="ctr">
                       <a:solidFill>
-                        <a:srgbClr val="D1EBF0"/>
+                        <a:srgbClr val="D1F3FA"/>
                       </a:solidFill>
                       <a:prstDash val="solid"/>
                     </a:lnT>
                     <a:lnB w="9525" cap="flat" cmpd="sng" algn="ctr">
                       <a:solidFill>
-                        <a:srgbClr val="D1EBF0"/>
+                        <a:srgbClr val="D1F3FA"/>
                       </a:solidFill>
                       <a:prstDash val="solid"/>
                     </a:lnB>
@@ -6655,25 +6655,25 @@
                   <a:tcPr anchor="ctr" marL="73152" marR="73152">
                     <a:lnL w="9525" cap="flat" cmpd="sng" algn="ctr">
                       <a:solidFill>
-                        <a:srgbClr val="D1EBF0"/>
+                        <a:srgbClr val="D1F3FA"/>
                       </a:solidFill>
                       <a:prstDash val="solid"/>
                     </a:lnL>
                     <a:lnR w="9525" cap="flat" cmpd="sng" algn="ctr">
                       <a:solidFill>
-                        <a:srgbClr val="D1EBF0"/>
+                        <a:srgbClr val="D1F3FA"/>
                       </a:solidFill>
                       <a:prstDash val="solid"/>
                     </a:lnR>
                     <a:lnT w="9525" cap="flat" cmpd="sng" algn="ctr">
                       <a:solidFill>
-                        <a:srgbClr val="D1EBF0"/>
+                        <a:srgbClr val="D1F3FA"/>
                       </a:solidFill>
                       <a:prstDash val="solid"/>
                     </a:lnT>
                     <a:lnB w="9525" cap="flat" cmpd="sng" algn="ctr">
                       <a:solidFill>
-                        <a:srgbClr val="D1EBF0"/>
+                        <a:srgbClr val="D1F3FA"/>
                       </a:solidFill>
                       <a:prstDash val="solid"/>
                     </a:lnB>
@@ -6701,25 +6701,25 @@
                   <a:tcPr anchor="ctr" marL="73152" marR="73152">
                     <a:lnL w="9525" cap="flat" cmpd="sng" algn="ctr">
                       <a:solidFill>
-                        <a:srgbClr val="D1EBF0"/>
+                        <a:srgbClr val="D1F3FA"/>
                       </a:solidFill>
                       <a:prstDash val="solid"/>
                     </a:lnL>
                     <a:lnR w="9525" cap="flat" cmpd="sng" algn="ctr">
                       <a:solidFill>
-                        <a:srgbClr val="D1EBF0"/>
+                        <a:srgbClr val="D1F3FA"/>
                       </a:solidFill>
                       <a:prstDash val="solid"/>
                     </a:lnR>
                     <a:lnT w="9525" cap="flat" cmpd="sng" algn="ctr">
                       <a:solidFill>
-                        <a:srgbClr val="D1EBF0"/>
+                        <a:srgbClr val="D1F3FA"/>
                       </a:solidFill>
                       <a:prstDash val="solid"/>
                     </a:lnT>
                     <a:lnB w="9525" cap="flat" cmpd="sng" algn="ctr">
                       <a:solidFill>
-                        <a:srgbClr val="D1EBF0"/>
+                        <a:srgbClr val="D1F3FA"/>
                       </a:solidFill>
                       <a:prstDash val="solid"/>
                     </a:lnB>
@@ -6739,7 +6739,7 @@
                       <a:r>
                         <a:rPr sz="1400" b="1">
                           <a:solidFill>
-                            <a:srgbClr val="23535C"/>
+                            <a:srgbClr val="11525F"/>
                           </a:solidFill>
                         </a:rPr>
                         <a:t>뇌·심장</a:t>
@@ -6749,30 +6749,30 @@
                   <a:tcPr anchor="ctr" marL="73152" marR="73152">
                     <a:lnL w="9525" cap="flat" cmpd="sng" algn="ctr">
                       <a:solidFill>
-                        <a:srgbClr val="D1EBF0"/>
+                        <a:srgbClr val="D1F3FA"/>
                       </a:solidFill>
                       <a:prstDash val="solid"/>
                     </a:lnL>
                     <a:lnR w="9525" cap="flat" cmpd="sng" algn="ctr">
                       <a:solidFill>
-                        <a:srgbClr val="D1EBF0"/>
+                        <a:srgbClr val="D1F3FA"/>
                       </a:solidFill>
                       <a:prstDash val="solid"/>
                     </a:lnR>
                     <a:lnT w="9525" cap="flat" cmpd="sng" algn="ctr">
                       <a:solidFill>
-                        <a:srgbClr val="D1EBF0"/>
+                        <a:srgbClr val="D1F3FA"/>
                       </a:solidFill>
                       <a:prstDash val="solid"/>
                     </a:lnT>
                     <a:lnB w="9525" cap="flat" cmpd="sng" algn="ctr">
                       <a:solidFill>
-                        <a:srgbClr val="D1EBF0"/>
+                        <a:srgbClr val="D1F3FA"/>
                       </a:solidFill>
                       <a:prstDash val="solid"/>
                     </a:lnB>
                     <a:solidFill>
-                      <a:srgbClr val="D1EBF0"/>
+                      <a:srgbClr val="D1F3FA"/>
                     </a:solidFill>
                   </a:tcPr>
                 </a:tc>
@@ -6795,30 +6795,30 @@
                   <a:tcPr anchor="ctr" marL="73152" marR="73152">
                     <a:lnL w="9525" cap="flat" cmpd="sng" algn="ctr">
                       <a:solidFill>
-                        <a:srgbClr val="D1EBF0"/>
+                        <a:srgbClr val="D1F3FA"/>
                       </a:solidFill>
                       <a:prstDash val="solid"/>
                     </a:lnL>
                     <a:lnR w="9525" cap="flat" cmpd="sng" algn="ctr">
                       <a:solidFill>
-                        <a:srgbClr val="D1EBF0"/>
+                        <a:srgbClr val="D1F3FA"/>
                       </a:solidFill>
                       <a:prstDash val="solid"/>
                     </a:lnR>
                     <a:lnT w="9525" cap="flat" cmpd="sng" algn="ctr">
                       <a:solidFill>
-                        <a:srgbClr val="D1EBF0"/>
+                        <a:srgbClr val="D1F3FA"/>
                       </a:solidFill>
                       <a:prstDash val="solid"/>
                     </a:lnT>
                     <a:lnB w="9525" cap="flat" cmpd="sng" algn="ctr">
                       <a:solidFill>
-                        <a:srgbClr val="D1EBF0"/>
+                        <a:srgbClr val="D1F3FA"/>
                       </a:solidFill>
                       <a:prstDash val="solid"/>
                     </a:lnB>
                     <a:solidFill>
-                      <a:srgbClr val="F0F8F9"/>
+                      <a:srgbClr val="EEFAFC"/>
                     </a:solidFill>
                   </a:tcPr>
                 </a:tc>
@@ -6841,30 +6841,30 @@
                   <a:tcPr anchor="ctr" marL="73152" marR="73152">
                     <a:lnL w="9525" cap="flat" cmpd="sng" algn="ctr">
                       <a:solidFill>
-                        <a:srgbClr val="D1EBF0"/>
+                        <a:srgbClr val="D1F3FA"/>
                       </a:solidFill>
                       <a:prstDash val="solid"/>
                     </a:lnL>
                     <a:lnR w="9525" cap="flat" cmpd="sng" algn="ctr">
                       <a:solidFill>
-                        <a:srgbClr val="D1EBF0"/>
+                        <a:srgbClr val="D1F3FA"/>
                       </a:solidFill>
                       <a:prstDash val="solid"/>
                     </a:lnR>
                     <a:lnT w="9525" cap="flat" cmpd="sng" algn="ctr">
                       <a:solidFill>
-                        <a:srgbClr val="D1EBF0"/>
+                        <a:srgbClr val="D1F3FA"/>
                       </a:solidFill>
                       <a:prstDash val="solid"/>
                     </a:lnT>
                     <a:lnB w="9525" cap="flat" cmpd="sng" algn="ctr">
                       <a:solidFill>
-                        <a:srgbClr val="D1EBF0"/>
+                        <a:srgbClr val="D1F3FA"/>
                       </a:solidFill>
                       <a:prstDash val="solid"/>
                     </a:lnB>
                     <a:solidFill>
-                      <a:srgbClr val="F0F8F9"/>
+                      <a:srgbClr val="EEFAFC"/>
                     </a:solidFill>
                   </a:tcPr>
                 </a:tc>
@@ -6887,30 +6887,30 @@
                   <a:tcPr anchor="ctr" marL="73152" marR="73152">
                     <a:lnL w="9525" cap="flat" cmpd="sng" algn="ctr">
                       <a:solidFill>
-                        <a:srgbClr val="D1EBF0"/>
+                        <a:srgbClr val="D1F3FA"/>
                       </a:solidFill>
                       <a:prstDash val="solid"/>
                     </a:lnL>
                     <a:lnR w="9525" cap="flat" cmpd="sng" algn="ctr">
                       <a:solidFill>
-                        <a:srgbClr val="D1EBF0"/>
+                        <a:srgbClr val="D1F3FA"/>
                       </a:solidFill>
                       <a:prstDash val="solid"/>
                     </a:lnR>
                     <a:lnT w="9525" cap="flat" cmpd="sng" algn="ctr">
                       <a:solidFill>
-                        <a:srgbClr val="D1EBF0"/>
+                        <a:srgbClr val="D1F3FA"/>
                       </a:solidFill>
                       <a:prstDash val="solid"/>
                     </a:lnT>
                     <a:lnB w="9525" cap="flat" cmpd="sng" algn="ctr">
                       <a:solidFill>
-                        <a:srgbClr val="D1EBF0"/>
+                        <a:srgbClr val="D1F3FA"/>
                       </a:solidFill>
                       <a:prstDash val="solid"/>
                     </a:lnB>
                     <a:solidFill>
-                      <a:srgbClr val="F0F8F9"/>
+                      <a:srgbClr val="EEFAFC"/>
                     </a:solidFill>
                   </a:tcPr>
                 </a:tc>
@@ -6925,7 +6925,7 @@
                       <a:r>
                         <a:rPr sz="1400" b="1">
                           <a:solidFill>
-                            <a:srgbClr val="23535C"/>
+                            <a:srgbClr val="11525F"/>
                           </a:solidFill>
                         </a:rPr>
                         <a:t>입원·수술</a:t>
@@ -6935,30 +6935,30 @@
                   <a:tcPr anchor="ctr" marL="73152" marR="73152">
                     <a:lnL w="9525" cap="flat" cmpd="sng" algn="ctr">
                       <a:solidFill>
-                        <a:srgbClr val="D1EBF0"/>
+                        <a:srgbClr val="D1F3FA"/>
                       </a:solidFill>
                       <a:prstDash val="solid"/>
                     </a:lnL>
                     <a:lnR w="9525" cap="flat" cmpd="sng" algn="ctr">
                       <a:solidFill>
-                        <a:srgbClr val="D1EBF0"/>
+                        <a:srgbClr val="D1F3FA"/>
                       </a:solidFill>
                       <a:prstDash val="solid"/>
                     </a:lnR>
                     <a:lnT w="9525" cap="flat" cmpd="sng" algn="ctr">
                       <a:solidFill>
-                        <a:srgbClr val="D1EBF0"/>
+                        <a:srgbClr val="D1F3FA"/>
                       </a:solidFill>
                       <a:prstDash val="solid"/>
                     </a:lnT>
                     <a:lnB w="9525" cap="flat" cmpd="sng" algn="ctr">
                       <a:solidFill>
-                        <a:srgbClr val="D1EBF0"/>
+                        <a:srgbClr val="D1F3FA"/>
                       </a:solidFill>
                       <a:prstDash val="solid"/>
                     </a:lnB>
                     <a:solidFill>
-                      <a:srgbClr val="D1EBF0"/>
+                      <a:srgbClr val="D1F3FA"/>
                     </a:solidFill>
                   </a:tcPr>
                 </a:tc>
@@ -6981,25 +6981,25 @@
                   <a:tcPr anchor="ctr" marL="73152" marR="73152">
                     <a:lnL w="9525" cap="flat" cmpd="sng" algn="ctr">
                       <a:solidFill>
-                        <a:srgbClr val="D1EBF0"/>
+                        <a:srgbClr val="D1F3FA"/>
                       </a:solidFill>
                       <a:prstDash val="solid"/>
                     </a:lnL>
                     <a:lnR w="9525" cap="flat" cmpd="sng" algn="ctr">
                       <a:solidFill>
-                        <a:srgbClr val="D1EBF0"/>
+                        <a:srgbClr val="D1F3FA"/>
                       </a:solidFill>
                       <a:prstDash val="solid"/>
                     </a:lnR>
                     <a:lnT w="9525" cap="flat" cmpd="sng" algn="ctr">
                       <a:solidFill>
-                        <a:srgbClr val="D1EBF0"/>
+                        <a:srgbClr val="D1F3FA"/>
                       </a:solidFill>
                       <a:prstDash val="solid"/>
                     </a:lnT>
                     <a:lnB w="9525" cap="flat" cmpd="sng" algn="ctr">
                       <a:solidFill>
-                        <a:srgbClr val="D1EBF0"/>
+                        <a:srgbClr val="D1F3FA"/>
                       </a:solidFill>
                       <a:prstDash val="solid"/>
                     </a:lnB>
@@ -7027,25 +7027,25 @@
                   <a:tcPr anchor="ctr" marL="73152" marR="73152">
                     <a:lnL w="9525" cap="flat" cmpd="sng" algn="ctr">
                       <a:solidFill>
-                        <a:srgbClr val="D1EBF0"/>
+                        <a:srgbClr val="D1F3FA"/>
                       </a:solidFill>
                       <a:prstDash val="solid"/>
                     </a:lnL>
                     <a:lnR w="9525" cap="flat" cmpd="sng" algn="ctr">
                       <a:solidFill>
-                        <a:srgbClr val="D1EBF0"/>
+                        <a:srgbClr val="D1F3FA"/>
                       </a:solidFill>
                       <a:prstDash val="solid"/>
                     </a:lnR>
                     <a:lnT w="9525" cap="flat" cmpd="sng" algn="ctr">
                       <a:solidFill>
-                        <a:srgbClr val="D1EBF0"/>
+                        <a:srgbClr val="D1F3FA"/>
                       </a:solidFill>
                       <a:prstDash val="solid"/>
                     </a:lnT>
                     <a:lnB w="9525" cap="flat" cmpd="sng" algn="ctr">
                       <a:solidFill>
-                        <a:srgbClr val="D1EBF0"/>
+                        <a:srgbClr val="D1F3FA"/>
                       </a:solidFill>
                       <a:prstDash val="solid"/>
                     </a:lnB>
@@ -7073,25 +7073,25 @@
                   <a:tcPr anchor="ctr" marL="73152" marR="73152">
                     <a:lnL w="9525" cap="flat" cmpd="sng" algn="ctr">
                       <a:solidFill>
-                        <a:srgbClr val="D1EBF0"/>
+                        <a:srgbClr val="D1F3FA"/>
                       </a:solidFill>
                       <a:prstDash val="solid"/>
                     </a:lnL>
                     <a:lnR w="9525" cap="flat" cmpd="sng" algn="ctr">
                       <a:solidFill>
-                        <a:srgbClr val="D1EBF0"/>
+                        <a:srgbClr val="D1F3FA"/>
                       </a:solidFill>
                       <a:prstDash val="solid"/>
                     </a:lnR>
                     <a:lnT w="9525" cap="flat" cmpd="sng" algn="ctr">
                       <a:solidFill>
-                        <a:srgbClr val="D1EBF0"/>
+                        <a:srgbClr val="D1F3FA"/>
                       </a:solidFill>
                       <a:prstDash val="solid"/>
                     </a:lnT>
                     <a:lnB w="9525" cap="flat" cmpd="sng" algn="ctr">
                       <a:solidFill>
-                        <a:srgbClr val="D1EBF0"/>
+                        <a:srgbClr val="D1F3FA"/>
                       </a:solidFill>
                       <a:prstDash val="solid"/>
                     </a:lnB>
@@ -7111,7 +7111,7 @@
                       <a:r>
                         <a:rPr sz="1400" b="1">
                           <a:solidFill>
-                            <a:srgbClr val="23535C"/>
+                            <a:srgbClr val="11525F"/>
                           </a:solidFill>
                         </a:rPr>
                         <a:t>상해</a:t>
@@ -7121,30 +7121,30 @@
                   <a:tcPr anchor="ctr" marL="73152" marR="73152">
                     <a:lnL w="9525" cap="flat" cmpd="sng" algn="ctr">
                       <a:solidFill>
-                        <a:srgbClr val="D1EBF0"/>
+                        <a:srgbClr val="D1F3FA"/>
                       </a:solidFill>
                       <a:prstDash val="solid"/>
                     </a:lnL>
                     <a:lnR w="9525" cap="flat" cmpd="sng" algn="ctr">
                       <a:solidFill>
-                        <a:srgbClr val="D1EBF0"/>
+                        <a:srgbClr val="D1F3FA"/>
                       </a:solidFill>
                       <a:prstDash val="solid"/>
                     </a:lnR>
                     <a:lnT w="9525" cap="flat" cmpd="sng" algn="ctr">
                       <a:solidFill>
-                        <a:srgbClr val="D1EBF0"/>
+                        <a:srgbClr val="D1F3FA"/>
                       </a:solidFill>
                       <a:prstDash val="solid"/>
                     </a:lnT>
                     <a:lnB w="9525" cap="flat" cmpd="sng" algn="ctr">
                       <a:solidFill>
-                        <a:srgbClr val="D1EBF0"/>
+                        <a:srgbClr val="D1F3FA"/>
                       </a:solidFill>
                       <a:prstDash val="solid"/>
                     </a:lnB>
                     <a:solidFill>
-                      <a:srgbClr val="D1EBF0"/>
+                      <a:srgbClr val="D1F3FA"/>
                     </a:solidFill>
                   </a:tcPr>
                 </a:tc>
@@ -7167,30 +7167,30 @@
                   <a:tcPr anchor="ctr" marL="73152" marR="73152">
                     <a:lnL w="9525" cap="flat" cmpd="sng" algn="ctr">
                       <a:solidFill>
-                        <a:srgbClr val="D1EBF0"/>
+                        <a:srgbClr val="D1F3FA"/>
                       </a:solidFill>
                       <a:prstDash val="solid"/>
                     </a:lnL>
                     <a:lnR w="9525" cap="flat" cmpd="sng" algn="ctr">
                       <a:solidFill>
-                        <a:srgbClr val="D1EBF0"/>
+                        <a:srgbClr val="D1F3FA"/>
                       </a:solidFill>
                       <a:prstDash val="solid"/>
                     </a:lnR>
                     <a:lnT w="9525" cap="flat" cmpd="sng" algn="ctr">
                       <a:solidFill>
-                        <a:srgbClr val="D1EBF0"/>
+                        <a:srgbClr val="D1F3FA"/>
                       </a:solidFill>
                       <a:prstDash val="solid"/>
                     </a:lnT>
                     <a:lnB w="9525" cap="flat" cmpd="sng" algn="ctr">
                       <a:solidFill>
-                        <a:srgbClr val="D1EBF0"/>
+                        <a:srgbClr val="D1F3FA"/>
                       </a:solidFill>
                       <a:prstDash val="solid"/>
                     </a:lnB>
                     <a:solidFill>
-                      <a:srgbClr val="F0F8F9"/>
+                      <a:srgbClr val="EEFAFC"/>
                     </a:solidFill>
                   </a:tcPr>
                 </a:tc>
@@ -7213,30 +7213,30 @@
                   <a:tcPr anchor="ctr" marL="73152" marR="73152">
                     <a:lnL w="9525" cap="flat" cmpd="sng" algn="ctr">
                       <a:solidFill>
-                        <a:srgbClr val="D1EBF0"/>
+                        <a:srgbClr val="D1F3FA"/>
                       </a:solidFill>
                       <a:prstDash val="solid"/>
                     </a:lnL>
                     <a:lnR w="9525" cap="flat" cmpd="sng" algn="ctr">
                       <a:solidFill>
-                        <a:srgbClr val="D1EBF0"/>
+                        <a:srgbClr val="D1F3FA"/>
                       </a:solidFill>
                       <a:prstDash val="solid"/>
                     </a:lnR>
                     <a:lnT w="9525" cap="flat" cmpd="sng" algn="ctr">
                       <a:solidFill>
-                        <a:srgbClr val="D1EBF0"/>
+                        <a:srgbClr val="D1F3FA"/>
                       </a:solidFill>
                       <a:prstDash val="solid"/>
                     </a:lnT>
                     <a:lnB w="9525" cap="flat" cmpd="sng" algn="ctr">
                       <a:solidFill>
-                        <a:srgbClr val="D1EBF0"/>
+                        <a:srgbClr val="D1F3FA"/>
                       </a:solidFill>
                       <a:prstDash val="solid"/>
                     </a:lnB>
                     <a:solidFill>
-                      <a:srgbClr val="F0F8F9"/>
+                      <a:srgbClr val="EEFAFC"/>
                     </a:solidFill>
                   </a:tcPr>
                 </a:tc>
@@ -7259,30 +7259,30 @@
                   <a:tcPr anchor="ctr" marL="73152" marR="73152">
                     <a:lnL w="9525" cap="flat" cmpd="sng" algn="ctr">
                       <a:solidFill>
-                        <a:srgbClr val="D1EBF0"/>
+                        <a:srgbClr val="D1F3FA"/>
                       </a:solidFill>
                       <a:prstDash val="solid"/>
                     </a:lnL>
                     <a:lnR w="9525" cap="flat" cmpd="sng" algn="ctr">
                       <a:solidFill>
-                        <a:srgbClr val="D1EBF0"/>
+                        <a:srgbClr val="D1F3FA"/>
                       </a:solidFill>
                       <a:prstDash val="solid"/>
                     </a:lnR>
                     <a:lnT w="9525" cap="flat" cmpd="sng" algn="ctr">
                       <a:solidFill>
-                        <a:srgbClr val="D1EBF0"/>
+                        <a:srgbClr val="D1F3FA"/>
                       </a:solidFill>
                       <a:prstDash val="solid"/>
                     </a:lnT>
                     <a:lnB w="9525" cap="flat" cmpd="sng" algn="ctr">
                       <a:solidFill>
-                        <a:srgbClr val="D1EBF0"/>
+                        <a:srgbClr val="D1F3FA"/>
                       </a:solidFill>
                       <a:prstDash val="solid"/>
                     </a:lnB>
                     <a:solidFill>
-                      <a:srgbClr val="F0F8F9"/>
+                      <a:srgbClr val="EEFAFC"/>
                     </a:solidFill>
                   </a:tcPr>
                 </a:tc>
@@ -7297,7 +7297,7 @@
                       <a:r>
                         <a:rPr sz="1400" b="1">
                           <a:solidFill>
-                            <a:srgbClr val="23535C"/>
+                            <a:srgbClr val="11525F"/>
                           </a:solidFill>
                         </a:rPr>
                         <a:t>실손의료</a:t>
@@ -7307,30 +7307,30 @@
                   <a:tcPr anchor="ctr" marL="73152" marR="73152">
                     <a:lnL w="9525" cap="flat" cmpd="sng" algn="ctr">
                       <a:solidFill>
-                        <a:srgbClr val="D1EBF0"/>
+                        <a:srgbClr val="D1F3FA"/>
                       </a:solidFill>
                       <a:prstDash val="solid"/>
                     </a:lnL>
                     <a:lnR w="9525" cap="flat" cmpd="sng" algn="ctr">
                       <a:solidFill>
-                        <a:srgbClr val="D1EBF0"/>
+                        <a:srgbClr val="D1F3FA"/>
                       </a:solidFill>
                       <a:prstDash val="solid"/>
                     </a:lnR>
                     <a:lnT w="9525" cap="flat" cmpd="sng" algn="ctr">
                       <a:solidFill>
-                        <a:srgbClr val="D1EBF0"/>
+                        <a:srgbClr val="D1F3FA"/>
                       </a:solidFill>
                       <a:prstDash val="solid"/>
                     </a:lnT>
                     <a:lnB w="9525" cap="flat" cmpd="sng" algn="ctr">
                       <a:solidFill>
-                        <a:srgbClr val="D1EBF0"/>
+                        <a:srgbClr val="D1F3FA"/>
                       </a:solidFill>
                       <a:prstDash val="solid"/>
                     </a:lnB>
                     <a:solidFill>
-                      <a:srgbClr val="D1EBF0"/>
+                      <a:srgbClr val="D1F3FA"/>
                     </a:solidFill>
                   </a:tcPr>
                 </a:tc>
@@ -7353,25 +7353,25 @@
                   <a:tcPr anchor="ctr" marL="73152" marR="73152">
                     <a:lnL w="9525" cap="flat" cmpd="sng" algn="ctr">
                       <a:solidFill>
-                        <a:srgbClr val="D1EBF0"/>
+                        <a:srgbClr val="D1F3FA"/>
                       </a:solidFill>
                       <a:prstDash val="solid"/>
                     </a:lnL>
                     <a:lnR w="9525" cap="flat" cmpd="sng" algn="ctr">
                       <a:solidFill>
-                        <a:srgbClr val="D1EBF0"/>
+                        <a:srgbClr val="D1F3FA"/>
                       </a:solidFill>
                       <a:prstDash val="solid"/>
                     </a:lnR>
                     <a:lnT w="9525" cap="flat" cmpd="sng" algn="ctr">
                       <a:solidFill>
-                        <a:srgbClr val="D1EBF0"/>
+                        <a:srgbClr val="D1F3FA"/>
                       </a:solidFill>
                       <a:prstDash val="solid"/>
                     </a:lnT>
                     <a:lnB w="9525" cap="flat" cmpd="sng" algn="ctr">
                       <a:solidFill>
-                        <a:srgbClr val="D1EBF0"/>
+                        <a:srgbClr val="D1F3FA"/>
                       </a:solidFill>
                       <a:prstDash val="solid"/>
                     </a:lnB>
@@ -7399,25 +7399,25 @@
                   <a:tcPr anchor="ctr" marL="73152" marR="73152">
                     <a:lnL w="9525" cap="flat" cmpd="sng" algn="ctr">
                       <a:solidFill>
-                        <a:srgbClr val="D1EBF0"/>
+                        <a:srgbClr val="D1F3FA"/>
                       </a:solidFill>
                       <a:prstDash val="solid"/>
                     </a:lnL>
                     <a:lnR w="9525" cap="flat" cmpd="sng" algn="ctr">
                       <a:solidFill>
-                        <a:srgbClr val="D1EBF0"/>
+                        <a:srgbClr val="D1F3FA"/>
                       </a:solidFill>
                       <a:prstDash val="solid"/>
                     </a:lnR>
                     <a:lnT w="9525" cap="flat" cmpd="sng" algn="ctr">
                       <a:solidFill>
-                        <a:srgbClr val="D1EBF0"/>
+                        <a:srgbClr val="D1F3FA"/>
                       </a:solidFill>
                       <a:prstDash val="solid"/>
                     </a:lnT>
                     <a:lnB w="9525" cap="flat" cmpd="sng" algn="ctr">
                       <a:solidFill>
-                        <a:srgbClr val="D1EBF0"/>
+                        <a:srgbClr val="D1F3FA"/>
                       </a:solidFill>
                       <a:prstDash val="solid"/>
                     </a:lnB>
@@ -7445,25 +7445,25 @@
                   <a:tcPr anchor="ctr" marL="73152" marR="73152">
                     <a:lnL w="9525" cap="flat" cmpd="sng" algn="ctr">
                       <a:solidFill>
-                        <a:srgbClr val="D1EBF0"/>
+                        <a:srgbClr val="D1F3FA"/>
                       </a:solidFill>
                       <a:prstDash val="solid"/>
                     </a:lnL>
                     <a:lnR w="9525" cap="flat" cmpd="sng" algn="ctr">
                       <a:solidFill>
-                        <a:srgbClr val="D1EBF0"/>
+                        <a:srgbClr val="D1F3FA"/>
                       </a:solidFill>
                       <a:prstDash val="solid"/>
                     </a:lnR>
                     <a:lnT w="9525" cap="flat" cmpd="sng" algn="ctr">
                       <a:solidFill>
-                        <a:srgbClr val="D1EBF0"/>
+                        <a:srgbClr val="D1F3FA"/>
                       </a:solidFill>
                       <a:prstDash val="solid"/>
                     </a:lnT>
                     <a:lnB w="9525" cap="flat" cmpd="sng" algn="ctr">
                       <a:solidFill>
-                        <a:srgbClr val="D1EBF0"/>
+                        <a:srgbClr val="D1F3FA"/>
                       </a:solidFill>
                       <a:prstDash val="solid"/>
                     </a:lnB>
@@ -7483,7 +7483,7 @@
                       <a:r>
                         <a:rPr sz="1400" b="1">
                           <a:solidFill>
-                            <a:srgbClr val="23535C"/>
+                            <a:srgbClr val="11525F"/>
                           </a:solidFill>
                         </a:rPr>
                         <a:t>연금·노후자금</a:t>
@@ -7493,30 +7493,30 @@
                   <a:tcPr anchor="ctr" marL="73152" marR="73152">
                     <a:lnL w="9525" cap="flat" cmpd="sng" algn="ctr">
                       <a:solidFill>
-                        <a:srgbClr val="D1EBF0"/>
+                        <a:srgbClr val="D1F3FA"/>
                       </a:solidFill>
                       <a:prstDash val="solid"/>
                     </a:lnL>
                     <a:lnR w="9525" cap="flat" cmpd="sng" algn="ctr">
                       <a:solidFill>
-                        <a:srgbClr val="D1EBF0"/>
+                        <a:srgbClr val="D1F3FA"/>
                       </a:solidFill>
                       <a:prstDash val="solid"/>
                     </a:lnR>
                     <a:lnT w="9525" cap="flat" cmpd="sng" algn="ctr">
                       <a:solidFill>
-                        <a:srgbClr val="D1EBF0"/>
+                        <a:srgbClr val="D1F3FA"/>
                       </a:solidFill>
                       <a:prstDash val="solid"/>
                     </a:lnT>
                     <a:lnB w="9525" cap="flat" cmpd="sng" algn="ctr">
                       <a:solidFill>
-                        <a:srgbClr val="D1EBF0"/>
+                        <a:srgbClr val="D1F3FA"/>
                       </a:solidFill>
                       <a:prstDash val="solid"/>
                     </a:lnB>
                     <a:solidFill>
-                      <a:srgbClr val="D1EBF0"/>
+                      <a:srgbClr val="D1F3FA"/>
                     </a:solidFill>
                   </a:tcPr>
                 </a:tc>
@@ -7539,30 +7539,30 @@
                   <a:tcPr anchor="ctr" marL="73152" marR="73152">
                     <a:lnL w="9525" cap="flat" cmpd="sng" algn="ctr">
                       <a:solidFill>
-                        <a:srgbClr val="D1EBF0"/>
+                        <a:srgbClr val="D1F3FA"/>
                       </a:solidFill>
                       <a:prstDash val="solid"/>
                     </a:lnL>
                     <a:lnR w="9525" cap="flat" cmpd="sng" algn="ctr">
                       <a:solidFill>
-                        <a:srgbClr val="D1EBF0"/>
+                        <a:srgbClr val="D1F3FA"/>
                       </a:solidFill>
                       <a:prstDash val="solid"/>
                     </a:lnR>
                     <a:lnT w="9525" cap="flat" cmpd="sng" algn="ctr">
                       <a:solidFill>
-                        <a:srgbClr val="D1EBF0"/>
+                        <a:srgbClr val="D1F3FA"/>
                       </a:solidFill>
                       <a:prstDash val="solid"/>
                     </a:lnT>
                     <a:lnB w="9525" cap="flat" cmpd="sng" algn="ctr">
                       <a:solidFill>
-                        <a:srgbClr val="D1EBF0"/>
+                        <a:srgbClr val="D1F3FA"/>
                       </a:solidFill>
                       <a:prstDash val="solid"/>
                     </a:lnB>
                     <a:solidFill>
-                      <a:srgbClr val="F0F8F9"/>
+                      <a:srgbClr val="EEFAFC"/>
                     </a:solidFill>
                   </a:tcPr>
                 </a:tc>
@@ -7585,30 +7585,30 @@
                   <a:tcPr anchor="ctr" marL="73152" marR="73152">
                     <a:lnL w="9525" cap="flat" cmpd="sng" algn="ctr">
                       <a:solidFill>
-                        <a:srgbClr val="D1EBF0"/>
+                        <a:srgbClr val="D1F3FA"/>
                       </a:solidFill>
                       <a:prstDash val="solid"/>
                     </a:lnL>
                     <a:lnR w="9525" cap="flat" cmpd="sng" algn="ctr">
                       <a:solidFill>
-                        <a:srgbClr val="D1EBF0"/>
+                        <a:srgbClr val="D1F3FA"/>
                       </a:solidFill>
                       <a:prstDash val="solid"/>
                     </a:lnR>
                     <a:lnT w="9525" cap="flat" cmpd="sng" algn="ctr">
                       <a:solidFill>
-                        <a:srgbClr val="D1EBF0"/>
+                        <a:srgbClr val="D1F3FA"/>
                       </a:solidFill>
                       <a:prstDash val="solid"/>
                     </a:lnT>
                     <a:lnB w="9525" cap="flat" cmpd="sng" algn="ctr">
                       <a:solidFill>
-                        <a:srgbClr val="D1EBF0"/>
+                        <a:srgbClr val="D1F3FA"/>
                       </a:solidFill>
                       <a:prstDash val="solid"/>
                     </a:lnB>
                     <a:solidFill>
-                      <a:srgbClr val="F0F8F9"/>
+                      <a:srgbClr val="EEFAFC"/>
                     </a:solidFill>
                   </a:tcPr>
                 </a:tc>
@@ -7631,30 +7631,30 @@
                   <a:tcPr anchor="ctr" marL="73152" marR="73152">
                     <a:lnL w="9525" cap="flat" cmpd="sng" algn="ctr">
                       <a:solidFill>
-                        <a:srgbClr val="D1EBF0"/>
+                        <a:srgbClr val="D1F3FA"/>
                       </a:solidFill>
                       <a:prstDash val="solid"/>
                     </a:lnL>
                     <a:lnR w="9525" cap="flat" cmpd="sng" algn="ctr">
                       <a:solidFill>
-                        <a:srgbClr val="D1EBF0"/>
+                        <a:srgbClr val="D1F3FA"/>
                       </a:solidFill>
                       <a:prstDash val="solid"/>
                     </a:lnR>
                     <a:lnT w="9525" cap="flat" cmpd="sng" algn="ctr">
                       <a:solidFill>
-                        <a:srgbClr val="D1EBF0"/>
+                        <a:srgbClr val="D1F3FA"/>
                       </a:solidFill>
                       <a:prstDash val="solid"/>
                     </a:lnT>
                     <a:lnB w="9525" cap="flat" cmpd="sng" algn="ctr">
                       <a:solidFill>
-                        <a:srgbClr val="D1EBF0"/>
+                        <a:srgbClr val="D1F3FA"/>
                       </a:solidFill>
                       <a:prstDash val="solid"/>
                     </a:lnB>
                     <a:solidFill>
-                      <a:srgbClr val="F0F8F9"/>
+                      <a:srgbClr val="EEFAFC"/>
                     </a:solidFill>
                   </a:tcPr>
                 </a:tc>
@@ -7677,7 +7677,7 @@
     <p:bg>
       <p:bgPr>
         <a:solidFill>
-          <a:srgbClr val="F0F8F9"/>
+          <a:srgbClr val="EEFAFC"/>
         </a:solidFill>
         <a:effectLst/>
       </p:bgPr>
@@ -7704,7 +7704,7 @@
             <a:avLst/>
           </a:prstGeom>
           <a:solidFill>
-            <a:srgbClr val="D1EBF0"/>
+            <a:srgbClr val="D1F3FA"/>
           </a:solidFill>
           <a:ln>
             <a:noFill/>
@@ -7733,7 +7733,7 @@
             <a:avLst/>
           </a:prstGeom>
           <a:solidFill>
-            <a:srgbClr val="3F95A6"/>
+            <a:srgbClr val="26AAC5"/>
           </a:solidFill>
           <a:ln>
             <a:noFill/>
@@ -7777,7 +7777,7 @@
             <a:r>
               <a:rPr sz="3000" b="1" i="0">
                 <a:solidFill>
-                  <a:srgbClr val="23535C"/>
+                  <a:srgbClr val="11525F"/>
                 </a:solidFill>
               </a:rPr>
               <a:t>월 보험료 한눈에</a:t>
@@ -7802,11 +7802,11 @@
             </a:avLst>
           </a:prstGeom>
           <a:solidFill>
-            <a:srgbClr val="F0F8F9"/>
+            <a:srgbClr val="EEFAFC"/>
           </a:solidFill>
           <a:ln w="15875">
             <a:solidFill>
-              <a:srgbClr val="D1EBF0"/>
+              <a:srgbClr val="D1F3FA"/>
             </a:solidFill>
           </a:ln>
         </p:spPr>
@@ -7833,7 +7833,7 @@
             <a:avLst/>
           </a:prstGeom>
           <a:solidFill>
-            <a:srgbClr val="3F95A6"/>
+            <a:srgbClr val="26AAC5"/>
           </a:solidFill>
           <a:ln>
             <a:noFill/>
@@ -7891,7 +7891,7 @@
             <a:r>
               <a:rPr sz="1700" b="1" i="0">
                 <a:solidFill>
-                  <a:srgbClr val="23535C"/>
+                  <a:srgbClr val="11525F"/>
                 </a:solidFill>
               </a:rPr>
               <a:t>월 보험료 합계</a:t>
@@ -7954,11 +7954,11 @@
             </a:avLst>
           </a:prstGeom>
           <a:solidFill>
-            <a:srgbClr val="F0F8F9"/>
+            <a:srgbClr val="EEFAFC"/>
           </a:solidFill>
           <a:ln w="15875">
             <a:solidFill>
-              <a:srgbClr val="D1EBF0"/>
+              <a:srgbClr val="D1F3FA"/>
             </a:solidFill>
           </a:ln>
         </p:spPr>
@@ -7985,7 +7985,7 @@
             <a:avLst/>
           </a:prstGeom>
           <a:solidFill>
-            <a:srgbClr val="3F95A6"/>
+            <a:srgbClr val="26AAC5"/>
           </a:solidFill>
           <a:ln>
             <a:noFill/>
@@ -8043,7 +8043,7 @@
             <a:r>
               <a:rPr sz="1700" b="1" i="0">
                 <a:solidFill>
-                  <a:srgbClr val="23535C"/>
+                  <a:srgbClr val="11525F"/>
                 </a:solidFill>
               </a:rPr>
               <a:t>연 보험료 합계</a:t>
@@ -8106,11 +8106,11 @@
             </a:avLst>
           </a:prstGeom>
           <a:solidFill>
-            <a:srgbClr val="F0F8F9"/>
+            <a:srgbClr val="EEFAFC"/>
           </a:solidFill>
           <a:ln w="15875">
             <a:solidFill>
-              <a:srgbClr val="D1EBF0"/>
+              <a:srgbClr val="D1F3FA"/>
             </a:solidFill>
           </a:ln>
         </p:spPr>
@@ -8137,7 +8137,7 @@
             <a:avLst/>
           </a:prstGeom>
           <a:solidFill>
-            <a:srgbClr val="3F95A6"/>
+            <a:srgbClr val="26AAC5"/>
           </a:solidFill>
           <a:ln>
             <a:noFill/>
@@ -8195,7 +8195,7 @@
             <a:r>
               <a:rPr sz="1700" b="1" i="0">
                 <a:solidFill>
-                  <a:srgbClr val="23535C"/>
+                  <a:srgbClr val="11525F"/>
                 </a:solidFill>
               </a:rPr>
               <a:t>월 소득 대비</a:t>
@@ -8293,7 +8293,7 @@
     <p:bg>
       <p:bgPr>
         <a:solidFill>
-          <a:srgbClr val="F0F8F9"/>
+          <a:srgbClr val="EEFAFC"/>
         </a:solidFill>
         <a:effectLst/>
       </p:bgPr>
@@ -8320,7 +8320,7 @@
             <a:avLst/>
           </a:prstGeom>
           <a:solidFill>
-            <a:srgbClr val="D1EBF0"/>
+            <a:srgbClr val="D1F3FA"/>
           </a:solidFill>
           <a:ln>
             <a:noFill/>
@@ -8349,7 +8349,7 @@
             <a:avLst/>
           </a:prstGeom>
           <a:solidFill>
-            <a:srgbClr val="3F95A6"/>
+            <a:srgbClr val="26AAC5"/>
           </a:solidFill>
           <a:ln>
             <a:noFill/>
@@ -8393,7 +8393,7 @@
             <a:r>
               <a:rPr sz="3000" b="1" i="0">
                 <a:solidFill>
-                  <a:srgbClr val="23535C"/>
+                  <a:srgbClr val="11525F"/>
                 </a:solidFill>
               </a:rPr>
               <a:t>점검 메모와 다음 할 일</a:t>
@@ -8418,11 +8418,11 @@
             </a:avLst>
           </a:prstGeom>
           <a:solidFill>
-            <a:srgbClr val="F0F8F9"/>
+            <a:srgbClr val="EEFAFC"/>
           </a:solidFill>
           <a:ln w="15875">
             <a:solidFill>
-              <a:srgbClr val="D1EBF0"/>
+              <a:srgbClr val="D1F3FA"/>
             </a:solidFill>
           </a:ln>
         </p:spPr>
@@ -8449,7 +8449,7 @@
             <a:avLst/>
           </a:prstGeom>
           <a:solidFill>
-            <a:srgbClr val="3F95A6"/>
+            <a:srgbClr val="26AAC5"/>
           </a:solidFill>
           <a:ln>
             <a:noFill/>
@@ -8507,7 +8507,7 @@
             <a:r>
               <a:rPr sz="1800" b="1" i="0">
                 <a:solidFill>
-                  <a:srgbClr val="23535C"/>
+                  <a:srgbClr val="11525F"/>
                 </a:solidFill>
               </a:rPr>
               <a:t>확인할 것</a:t>
@@ -8570,11 +8570,11 @@
             </a:avLst>
           </a:prstGeom>
           <a:solidFill>
-            <a:srgbClr val="F0F8F9"/>
+            <a:srgbClr val="EEFAFC"/>
           </a:solidFill>
           <a:ln w="15875">
             <a:solidFill>
-              <a:srgbClr val="D1EBF0"/>
+              <a:srgbClr val="D1F3FA"/>
             </a:solidFill>
           </a:ln>
         </p:spPr>
@@ -8601,7 +8601,7 @@
             <a:avLst/>
           </a:prstGeom>
           <a:solidFill>
-            <a:srgbClr val="3F95A6"/>
+            <a:srgbClr val="26AAC5"/>
           </a:solidFill>
           <a:ln>
             <a:noFill/>
@@ -8659,7 +8659,7 @@
             <a:r>
               <a:rPr sz="1800" b="1" i="0">
                 <a:solidFill>
-                  <a:srgbClr val="23535C"/>
+                  <a:srgbClr val="11525F"/>
                 </a:solidFill>
               </a:rPr>
               <a:t>문의할 것</a:t>
@@ -8722,11 +8722,11 @@
             </a:avLst>
           </a:prstGeom>
           <a:solidFill>
-            <a:srgbClr val="F0F8F9"/>
+            <a:srgbClr val="EEFAFC"/>
           </a:solidFill>
           <a:ln w="15875">
             <a:solidFill>
-              <a:srgbClr val="D1EBF0"/>
+              <a:srgbClr val="D1F3FA"/>
             </a:solidFill>
           </a:ln>
         </p:spPr>
@@ -8753,7 +8753,7 @@
             <a:avLst/>
           </a:prstGeom>
           <a:solidFill>
-            <a:srgbClr val="3F95A6"/>
+            <a:srgbClr val="26AAC5"/>
           </a:solidFill>
           <a:ln>
             <a:noFill/>
@@ -8811,7 +8811,7 @@
             <a:r>
               <a:rPr sz="1800" b="1" i="0">
                 <a:solidFill>
-                  <a:srgbClr val="23535C"/>
+                  <a:srgbClr val="11525F"/>
                 </a:solidFill>
               </a:rPr>
               <a:t>정리할 날짜</a:t>
@@ -8914,34 +8914,34 @@
         <a:sysClr val="window" lastClr="FFFFFF"/>
       </a:lt1>
       <a:dk2>
-        <a:srgbClr val="23535C"/>
+        <a:srgbClr val="11525F"/>
       </a:dk2>
       <a:lt2>
-        <a:srgbClr val="F0F8F9"/>
+        <a:srgbClr val="EEFAFC"/>
       </a:lt2>
       <a:accent1>
-        <a:srgbClr val="3F95A6"/>
+        <a:srgbClr val="26AAC5"/>
       </a:accent1>
       <a:accent2>
-        <a:srgbClr val="913B58"/>
+        <a:srgbClr val="209DB6"/>
       </a:accent2>
       <a:accent3>
-        <a:srgbClr val="23535C"/>
+        <a:srgbClr val="11525F"/>
       </a:accent3>
       <a:accent4>
-        <a:srgbClr val="D1EBF0"/>
+        <a:srgbClr val="D1F3FA"/>
       </a:accent4>
       <a:accent5>
-        <a:srgbClr val="68687F"/>
+        <a:srgbClr val="23A4BE"/>
       </a:accent5>
       <a:accent6>
-        <a:srgbClr val="7B989D"/>
+        <a:srgbClr val="70979F"/>
       </a:accent6>
       <a:hlink>
-        <a:srgbClr val="3F95A6"/>
+        <a:srgbClr val="26AAC5"/>
       </a:hlink>
       <a:folHlink>
-        <a:srgbClr val="23535C"/>
+        <a:srgbClr val="11525F"/>
       </a:folHlink>
     </a:clrScheme>
     <a:fontScheme name="Office">
